--- a/docs/presentations/ai-agent-identity-crisis/ai-agent-identity-crisis.pptx
+++ b/docs/presentations/ai-agent-identity-crisis/ai-agent-identity-crisis.pptx
@@ -12280,7 +12280,13 @@
           </a:bodyPr>
           <a:lstStyle/>
           <a:p>
-            <a:pPr algn="l"/>
+            <a:pPr algn="l">
+              <a:defRPr>
+                <a:solidFill>
+                  <a:srgbClr val="00D4A8"/>
+                </a:solidFill>
+              </a:defRPr>
+            </a:pPr>
             <a:r>
               <a:rPr sz="1300" b="1" i="0">
                 <a:solidFill>
@@ -12315,7 +12321,13 @@
           </a:bodyPr>
           <a:lstStyle/>
           <a:p>
-            <a:pPr algn="l"/>
+            <a:pPr algn="l">
+              <a:defRPr>
+                <a:solidFill>
+                  <a:srgbClr val="FFFFFF"/>
+                </a:solidFill>
+              </a:defRPr>
+            </a:pPr>
             <a:r>
               <a:rPr sz="5400" b="1">
                 <a:solidFill>
@@ -12350,7 +12362,13 @@
           </a:bodyPr>
           <a:lstStyle/>
           <a:p>
-            <a:pPr algn="l"/>
+            <a:pPr algn="l">
+              <a:defRPr>
+                <a:solidFill>
+                  <a:srgbClr val="C3EFE3"/>
+                </a:solidFill>
+              </a:defRPr>
+            </a:pPr>
             <a:r>
               <a:rPr sz="2200" i="0">
                 <a:solidFill>
@@ -12560,7 +12578,13 @@
           </a:bodyPr>
           <a:lstStyle/>
           <a:p>
-            <a:pPr algn="l"/>
+            <a:pPr algn="l">
+              <a:defRPr>
+                <a:solidFill>
+                  <a:srgbClr val="1A1D23"/>
+                </a:solidFill>
+              </a:defRPr>
+            </a:pPr>
             <a:r>
               <a:rPr sz="3600" b="1">
                 <a:solidFill>
@@ -12595,7 +12619,13 @@
           </a:bodyPr>
           <a:lstStyle/>
           <a:p>
-            <a:pPr algn="l"/>
+            <a:pPr algn="l">
+              <a:defRPr>
+                <a:solidFill>
+                  <a:srgbClr val="64748B"/>
+                </a:solidFill>
+              </a:defRPr>
+            </a:pPr>
             <a:r>
               <a:rPr sz="1800" i="1">
                 <a:solidFill>
@@ -12634,6 +12664,11 @@
               <a:spcAft>
                 <a:spcPts val="600"/>
               </a:spcAft>
+              <a:defRPr>
+                <a:solidFill>
+                  <a:srgbClr val="1A1D23"/>
+                </a:solidFill>
+              </a:defRPr>
             </a:pPr>
             <a:r>
               <a:rPr sz="1600" b="1">
@@ -12668,6 +12703,11 @@
               <a:spcAft>
                 <a:spcPts val="600"/>
               </a:spcAft>
+              <a:defRPr>
+                <a:solidFill>
+                  <a:srgbClr val="1A1D23"/>
+                </a:solidFill>
+              </a:defRPr>
             </a:pPr>
             <a:r>
               <a:rPr sz="1600" b="1">
@@ -12702,6 +12742,11 @@
               <a:spcAft>
                 <a:spcPts val="600"/>
               </a:spcAft>
+              <a:defRPr>
+                <a:solidFill>
+                  <a:srgbClr val="1A1D23"/>
+                </a:solidFill>
+              </a:defRPr>
             </a:pPr>
             <a:r>
               <a:rPr sz="1600" b="1">
@@ -12736,6 +12781,11 @@
               <a:spcAft>
                 <a:spcPts val="600"/>
               </a:spcAft>
+              <a:defRPr>
+                <a:solidFill>
+                  <a:srgbClr val="1A1D23"/>
+                </a:solidFill>
+              </a:defRPr>
             </a:pPr>
             <a:r>
               <a:rPr sz="1600" b="1">
@@ -12770,6 +12820,11 @@
               <a:spcAft>
                 <a:spcPts val="600"/>
               </a:spcAft>
+              <a:defRPr>
+                <a:solidFill>
+                  <a:srgbClr val="1A1D23"/>
+                </a:solidFill>
+              </a:defRPr>
             </a:pPr>
             <a:r>
               <a:rPr sz="1600" b="1">
@@ -12804,6 +12859,11 @@
               <a:spcAft>
                 <a:spcPts val="600"/>
               </a:spcAft>
+              <a:defRPr>
+                <a:solidFill>
+                  <a:srgbClr val="1A1D23"/>
+                </a:solidFill>
+              </a:defRPr>
             </a:pPr>
             <a:r>
               <a:rPr sz="1600" b="1">
@@ -13031,7 +13091,13 @@
           </a:bodyPr>
           <a:lstStyle/>
           <a:p>
-            <a:pPr algn="l"/>
+            <a:pPr algn="l">
+              <a:defRPr>
+                <a:solidFill>
+                  <a:srgbClr val="FFFFFF"/>
+                </a:solidFill>
+              </a:defRPr>
+            </a:pPr>
             <a:r>
               <a:rPr sz="4000" b="1">
                 <a:solidFill>
@@ -13066,7 +13132,13 @@
           </a:bodyPr>
           <a:lstStyle/>
           <a:p>
-            <a:pPr algn="l"/>
+            <a:pPr algn="l">
+              <a:defRPr>
+                <a:solidFill>
+                  <a:srgbClr val="C3EFE3"/>
+                </a:solidFill>
+              </a:defRPr>
+            </a:pPr>
             <a:r>
               <a:rPr sz="1800" i="0">
                 <a:solidFill>
@@ -13101,7 +13173,13 @@
           </a:bodyPr>
           <a:lstStyle/>
           <a:p>
-            <a:pPr algn="l"/>
+            <a:pPr algn="l">
+              <a:defRPr>
+                <a:solidFill>
+                  <a:srgbClr val="FFFFFF"/>
+                </a:solidFill>
+              </a:defRPr>
+            </a:pPr>
             <a:r>
               <a:rPr sz="1600" b="0" i="0">
                 <a:solidFill>
@@ -13138,7 +13216,13 @@
           </a:bodyPr>
           <a:lstStyle/>
           <a:p>
-            <a:pPr algn="l"/>
+            <a:pPr algn="l">
+              <a:defRPr>
+                <a:solidFill>
+                  <a:srgbClr val="00D4A8"/>
+                </a:solidFill>
+              </a:defRPr>
+            </a:pPr>
             <a:r>
               <a:rPr sz="1200" b="1" i="0">
                 <a:solidFill>
@@ -13173,7 +13257,13 @@
           </a:bodyPr>
           <a:lstStyle/>
           <a:p>
-            <a:pPr algn="l"/>
+            <a:pPr algn="l">
+              <a:defRPr>
+                <a:solidFill>
+                  <a:srgbClr val="C3EFE3"/>
+                </a:solidFill>
+              </a:defRPr>
+            </a:pPr>
             <a:r>
               <a:rPr sz="1200" b="0" i="0">
                 <a:solidFill>
@@ -13208,7 +13298,13 @@
           </a:bodyPr>
           <a:lstStyle/>
           <a:p>
-            <a:pPr algn="l"/>
+            <a:pPr algn="l">
+              <a:defRPr>
+                <a:solidFill>
+                  <a:srgbClr val="C3EFE3"/>
+                </a:solidFill>
+              </a:defRPr>
+            </a:pPr>
             <a:r>
               <a:rPr sz="1200" b="0" i="0">
                 <a:solidFill>
@@ -13243,7 +13339,13 @@
           </a:bodyPr>
           <a:lstStyle/>
           <a:p>
-            <a:pPr algn="l"/>
+            <a:pPr algn="l">
+              <a:defRPr>
+                <a:solidFill>
+                  <a:srgbClr val="C3EFE3"/>
+                </a:solidFill>
+              </a:defRPr>
+            </a:pPr>
             <a:r>
               <a:rPr sz="1200" b="0" i="0">
                 <a:solidFill>
@@ -13278,7 +13380,13 @@
           </a:bodyPr>
           <a:lstStyle/>
           <a:p>
-            <a:pPr algn="l"/>
+            <a:pPr algn="l">
+              <a:defRPr>
+                <a:solidFill>
+                  <a:srgbClr val="C3EFE3"/>
+                </a:solidFill>
+              </a:defRPr>
+            </a:pPr>
             <a:r>
               <a:rPr sz="1200" b="0" i="0">
                 <a:solidFill>
@@ -13313,7 +13421,13 @@
           </a:bodyPr>
           <a:lstStyle/>
           <a:p>
-            <a:pPr algn="l"/>
+            <a:pPr algn="l">
+              <a:defRPr>
+                <a:solidFill>
+                  <a:srgbClr val="C3EFE3"/>
+                </a:solidFill>
+              </a:defRPr>
+            </a:pPr>
             <a:r>
               <a:rPr sz="1200" b="0" i="0">
                 <a:solidFill>
@@ -13348,7 +13462,13 @@
           </a:bodyPr>
           <a:lstStyle/>
           <a:p>
-            <a:pPr algn="l"/>
+            <a:pPr algn="l">
+              <a:defRPr>
+                <a:solidFill>
+                  <a:srgbClr val="C3EFE3"/>
+                </a:solidFill>
+              </a:defRPr>
+            </a:pPr>
             <a:r>
               <a:rPr sz="1200" b="0" i="0">
                 <a:solidFill>
@@ -13383,7 +13503,13 @@
           </a:bodyPr>
           <a:lstStyle/>
           <a:p>
-            <a:pPr algn="l"/>
+            <a:pPr algn="l">
+              <a:defRPr>
+                <a:solidFill>
+                  <a:srgbClr val="C3EFE3"/>
+                </a:solidFill>
+              </a:defRPr>
+            </a:pPr>
             <a:r>
               <a:rPr sz="1200" b="0" i="0">
                 <a:solidFill>
@@ -13592,7 +13718,13 @@
           </a:bodyPr>
           <a:lstStyle/>
           <a:p>
-            <a:pPr algn="l"/>
+            <a:pPr algn="l">
+              <a:defRPr>
+                <a:solidFill>
+                  <a:srgbClr val="1A1D23"/>
+                </a:solidFill>
+              </a:defRPr>
+            </a:pPr>
             <a:r>
               <a:rPr sz="3600" b="1">
                 <a:solidFill>
@@ -13627,7 +13759,13 @@
           </a:bodyPr>
           <a:lstStyle/>
           <a:p>
-            <a:pPr algn="l"/>
+            <a:pPr algn="l">
+              <a:defRPr>
+                <a:solidFill>
+                  <a:srgbClr val="64748B"/>
+                </a:solidFill>
+              </a:defRPr>
+            </a:pPr>
             <a:r>
               <a:rPr sz="1800" i="1">
                 <a:solidFill>
@@ -13752,7 +13890,13 @@
           </a:bodyPr>
           <a:lstStyle/>
           <a:p>
-            <a:pPr algn="ctr"/>
+            <a:pPr algn="ctr">
+              <a:defRPr>
+                <a:solidFill>
+                  <a:srgbClr val="FFFFFF"/>
+                </a:solidFill>
+              </a:defRPr>
+            </a:pPr>
             <a:r>
               <a:rPr sz="1500" b="1" i="0">
                 <a:solidFill>
@@ -14044,7 +14188,13 @@
           </a:bodyPr>
           <a:lstStyle/>
           <a:p>
-            <a:pPr algn="ctr"/>
+            <a:pPr algn="ctr">
+              <a:defRPr>
+                <a:solidFill>
+                  <a:srgbClr val="FFFFFF"/>
+                </a:solidFill>
+              </a:defRPr>
+            </a:pPr>
             <a:r>
               <a:rPr sz="1500" b="1" i="0">
                 <a:solidFill>
@@ -14420,7 +14570,13 @@
           </a:bodyPr>
           <a:lstStyle/>
           <a:p>
-            <a:pPr algn="l"/>
+            <a:pPr algn="l">
+              <a:defRPr>
+                <a:solidFill>
+                  <a:srgbClr val="1A1D23"/>
+                </a:solidFill>
+              </a:defRPr>
+            </a:pPr>
             <a:r>
               <a:rPr sz="3600" b="1">
                 <a:solidFill>
@@ -14459,6 +14615,11 @@
               <a:spcAft>
                 <a:spcPts val="600"/>
               </a:spcAft>
+              <a:defRPr>
+                <a:solidFill>
+                  <a:srgbClr val="1A1D23"/>
+                </a:solidFill>
+              </a:defRPr>
             </a:pPr>
             <a:r>
               <a:rPr sz="1600" b="1">
@@ -14493,6 +14654,11 @@
               <a:spcAft>
                 <a:spcPts val="600"/>
               </a:spcAft>
+              <a:defRPr>
+                <a:solidFill>
+                  <a:srgbClr val="1A1D23"/>
+                </a:solidFill>
+              </a:defRPr>
             </a:pPr>
             <a:r>
               <a:rPr sz="1600" b="1">
@@ -14527,6 +14693,11 @@
               <a:spcAft>
                 <a:spcPts val="600"/>
               </a:spcAft>
+              <a:defRPr>
+                <a:solidFill>
+                  <a:srgbClr val="1A1D23"/>
+                </a:solidFill>
+              </a:defRPr>
             </a:pPr>
             <a:r>
               <a:rPr sz="1600" b="1">
@@ -14561,6 +14732,11 @@
               <a:spcAft>
                 <a:spcPts val="600"/>
               </a:spcAft>
+              <a:defRPr>
+                <a:solidFill>
+                  <a:srgbClr val="1A1D23"/>
+                </a:solidFill>
+              </a:defRPr>
             </a:pPr>
             <a:r>
               <a:rPr sz="1600" b="1">
@@ -14595,6 +14771,11 @@
               <a:spcAft>
                 <a:spcPts val="600"/>
               </a:spcAft>
+              <a:defRPr>
+                <a:solidFill>
+                  <a:srgbClr val="1A1D23"/>
+                </a:solidFill>
+              </a:defRPr>
             </a:pPr>
             <a:r>
               <a:rPr sz="1600" b="1">
@@ -14822,7 +15003,13 @@
           </a:bodyPr>
           <a:lstStyle/>
           <a:p>
-            <a:pPr algn="l"/>
+            <a:pPr algn="l">
+              <a:defRPr>
+                <a:solidFill>
+                  <a:srgbClr val="1A1D23"/>
+                </a:solidFill>
+              </a:defRPr>
+            </a:pPr>
             <a:r>
               <a:rPr sz="3600" b="1">
                 <a:solidFill>
@@ -14861,6 +15048,11 @@
               <a:spcAft>
                 <a:spcPts val="600"/>
               </a:spcAft>
+              <a:defRPr>
+                <a:solidFill>
+                  <a:srgbClr val="1A1D23"/>
+                </a:solidFill>
+              </a:defRPr>
             </a:pPr>
             <a:r>
               <a:rPr sz="1600" b="1">
@@ -14895,6 +15087,11 @@
               <a:spcAft>
                 <a:spcPts val="600"/>
               </a:spcAft>
+              <a:defRPr>
+                <a:solidFill>
+                  <a:srgbClr val="1A1D23"/>
+                </a:solidFill>
+              </a:defRPr>
             </a:pPr>
             <a:r>
               <a:rPr sz="1600" b="1">
@@ -14929,6 +15126,11 @@
               <a:spcAft>
                 <a:spcPts val="600"/>
               </a:spcAft>
+              <a:defRPr>
+                <a:solidFill>
+                  <a:srgbClr val="1A1D23"/>
+                </a:solidFill>
+              </a:defRPr>
             </a:pPr>
             <a:r>
               <a:rPr sz="1600" b="1">
@@ -14963,6 +15165,11 @@
               <a:spcAft>
                 <a:spcPts val="600"/>
               </a:spcAft>
+              <a:defRPr>
+                <a:solidFill>
+                  <a:srgbClr val="1A1D23"/>
+                </a:solidFill>
+              </a:defRPr>
             </a:pPr>
             <a:r>
               <a:rPr sz="1600" b="1">
@@ -14997,6 +15204,11 @@
               <a:spcAft>
                 <a:spcPts val="600"/>
               </a:spcAft>
+              <a:defRPr>
+                <a:solidFill>
+                  <a:srgbClr val="1A1D23"/>
+                </a:solidFill>
+              </a:defRPr>
             </a:pPr>
             <a:r>
               <a:rPr sz="1600" b="1">
@@ -15224,7 +15436,13 @@
           </a:bodyPr>
           <a:lstStyle/>
           <a:p>
-            <a:pPr algn="l"/>
+            <a:pPr algn="l">
+              <a:defRPr>
+                <a:solidFill>
+                  <a:srgbClr val="1A1D23"/>
+                </a:solidFill>
+              </a:defRPr>
+            </a:pPr>
             <a:r>
               <a:rPr sz="3600" b="1">
                 <a:solidFill>
@@ -15283,7 +15501,13 @@
           </a:bodyPr>
           <a:lstStyle/>
           <a:p>
-            <a:pPr algn="ctr"/>
+            <a:pPr algn="ctr">
+              <a:defRPr>
+                <a:solidFill>
+                  <a:srgbClr val="64748B"/>
+                </a:solidFill>
+              </a:defRPr>
+            </a:pPr>
             <a:r>
               <a:rPr sz="1000" b="0" i="1">
                 <a:solidFill>
@@ -15492,7 +15716,13 @@
           </a:bodyPr>
           <a:lstStyle/>
           <a:p>
-            <a:pPr algn="l"/>
+            <a:pPr algn="l">
+              <a:defRPr>
+                <a:solidFill>
+                  <a:srgbClr val="1A1D23"/>
+                </a:solidFill>
+              </a:defRPr>
+            </a:pPr>
             <a:r>
               <a:rPr sz="3600" b="1">
                 <a:solidFill>
@@ -15527,7 +15757,13 @@
           </a:bodyPr>
           <a:lstStyle/>
           <a:p>
-            <a:pPr algn="l"/>
+            <a:pPr algn="l">
+              <a:defRPr>
+                <a:solidFill>
+                  <a:srgbClr val="64748B"/>
+                </a:solidFill>
+              </a:defRPr>
+            </a:pPr>
             <a:r>
               <a:rPr sz="1800" i="1">
                 <a:solidFill>
@@ -15652,7 +15888,13 @@
           </a:bodyPr>
           <a:lstStyle/>
           <a:p>
-            <a:pPr algn="ctr"/>
+            <a:pPr algn="ctr">
+              <a:defRPr>
+                <a:solidFill>
+                  <a:srgbClr val="FFFFFF"/>
+                </a:solidFill>
+              </a:defRPr>
+            </a:pPr>
             <a:r>
               <a:rPr sz="1500" b="1" i="0">
                 <a:solidFill>
@@ -15896,7 +16138,13 @@
           </a:bodyPr>
           <a:lstStyle/>
           <a:p>
-            <a:pPr algn="ctr"/>
+            <a:pPr algn="ctr">
+              <a:defRPr>
+                <a:solidFill>
+                  <a:srgbClr val="FFFFFF"/>
+                </a:solidFill>
+              </a:defRPr>
+            </a:pPr>
             <a:r>
               <a:rPr sz="1500" b="1" i="0">
                 <a:solidFill>
@@ -16224,7 +16472,13 @@
           </a:bodyPr>
           <a:lstStyle/>
           <a:p>
-            <a:pPr algn="l"/>
+            <a:pPr algn="l">
+              <a:defRPr>
+                <a:solidFill>
+                  <a:srgbClr val="00D4A8"/>
+                </a:solidFill>
+              </a:defRPr>
+            </a:pPr>
             <a:r>
               <a:rPr sz="1800" b="1" i="0">
                 <a:solidFill>
@@ -16259,7 +16513,13 @@
           </a:bodyPr>
           <a:lstStyle/>
           <a:p>
-            <a:pPr algn="l"/>
+            <a:pPr algn="l">
+              <a:defRPr>
+                <a:solidFill>
+                  <a:srgbClr val="FFFFFF"/>
+                </a:solidFill>
+              </a:defRPr>
+            </a:pPr>
             <a:r>
               <a:rPr sz="4800" b="1">
                 <a:solidFill>
@@ -16294,7 +16554,13 @@
           </a:bodyPr>
           <a:lstStyle/>
           <a:p>
-            <a:pPr algn="l"/>
+            <a:pPr algn="l">
+              <a:defRPr>
+                <a:solidFill>
+                  <a:srgbClr val="C3EFE3"/>
+                </a:solidFill>
+              </a:defRPr>
+            </a:pPr>
             <a:r>
               <a:rPr sz="2000" i="0">
                 <a:solidFill>
@@ -16503,7 +16769,13 @@
           </a:bodyPr>
           <a:lstStyle/>
           <a:p>
-            <a:pPr algn="l"/>
+            <a:pPr algn="l">
+              <a:defRPr>
+                <a:solidFill>
+                  <a:srgbClr val="1A1D23"/>
+                </a:solidFill>
+              </a:defRPr>
+            </a:pPr>
             <a:r>
               <a:rPr sz="3600" b="1">
                 <a:solidFill>
@@ -16538,7 +16810,13 @@
           </a:bodyPr>
           <a:lstStyle/>
           <a:p>
-            <a:pPr algn="l"/>
+            <a:pPr algn="l">
+              <a:defRPr>
+                <a:solidFill>
+                  <a:srgbClr val="64748B"/>
+                </a:solidFill>
+              </a:defRPr>
+            </a:pPr>
             <a:r>
               <a:rPr sz="1800" i="1">
                 <a:solidFill>
@@ -16577,6 +16855,11 @@
               <a:spcAft>
                 <a:spcPts val="600"/>
               </a:spcAft>
+              <a:defRPr>
+                <a:solidFill>
+                  <a:srgbClr val="1A1D23"/>
+                </a:solidFill>
+              </a:defRPr>
             </a:pPr>
             <a:r>
               <a:rPr sz="1600" b="1">
@@ -16611,6 +16894,11 @@
               <a:spcAft>
                 <a:spcPts val="600"/>
               </a:spcAft>
+              <a:defRPr>
+                <a:solidFill>
+                  <a:srgbClr val="1A1D23"/>
+                </a:solidFill>
+              </a:defRPr>
             </a:pPr>
             <a:r>
               <a:rPr sz="1600" b="1">
@@ -16645,6 +16933,11 @@
               <a:spcAft>
                 <a:spcPts val="600"/>
               </a:spcAft>
+              <a:defRPr>
+                <a:solidFill>
+                  <a:srgbClr val="1A1D23"/>
+                </a:solidFill>
+              </a:defRPr>
             </a:pPr>
             <a:r>
               <a:rPr sz="1600" b="1">
@@ -16679,6 +16972,11 @@
               <a:spcAft>
                 <a:spcPts val="600"/>
               </a:spcAft>
+              <a:defRPr>
+                <a:solidFill>
+                  <a:srgbClr val="1A1D23"/>
+                </a:solidFill>
+              </a:defRPr>
             </a:pPr>
             <a:r>
               <a:rPr sz="1600" b="1">
@@ -16713,6 +17011,11 @@
               <a:spcAft>
                 <a:spcPts val="600"/>
               </a:spcAft>
+              <a:defRPr>
+                <a:solidFill>
+                  <a:srgbClr val="1A1D23"/>
+                </a:solidFill>
+              </a:defRPr>
             </a:pPr>
             <a:r>
               <a:rPr sz="1600" b="1">
@@ -16747,6 +17050,11 @@
               <a:spcAft>
                 <a:spcPts val="600"/>
               </a:spcAft>
+              <a:defRPr>
+                <a:solidFill>
+                  <a:srgbClr val="1A1D23"/>
+                </a:solidFill>
+              </a:defRPr>
             </a:pPr>
             <a:r>
               <a:rPr sz="1600" b="1">
@@ -16974,7 +17282,13 @@
           </a:bodyPr>
           <a:lstStyle/>
           <a:p>
-            <a:pPr algn="l"/>
+            <a:pPr algn="l">
+              <a:defRPr>
+                <a:solidFill>
+                  <a:srgbClr val="1A1D23"/>
+                </a:solidFill>
+              </a:defRPr>
+            </a:pPr>
             <a:r>
               <a:rPr sz="3600" b="1">
                 <a:solidFill>
@@ -17013,6 +17327,11 @@
               <a:spcAft>
                 <a:spcPts val="600"/>
               </a:spcAft>
+              <a:defRPr>
+                <a:solidFill>
+                  <a:srgbClr val="1A1D23"/>
+                </a:solidFill>
+              </a:defRPr>
             </a:pPr>
             <a:r>
               <a:rPr sz="1600" b="1">
@@ -17047,6 +17366,11 @@
               <a:spcAft>
                 <a:spcPts val="600"/>
               </a:spcAft>
+              <a:defRPr>
+                <a:solidFill>
+                  <a:srgbClr val="1A1D23"/>
+                </a:solidFill>
+              </a:defRPr>
             </a:pPr>
             <a:r>
               <a:rPr sz="1600" b="1">
@@ -17081,6 +17405,11 @@
               <a:spcAft>
                 <a:spcPts val="600"/>
               </a:spcAft>
+              <a:defRPr>
+                <a:solidFill>
+                  <a:srgbClr val="1A1D23"/>
+                </a:solidFill>
+              </a:defRPr>
             </a:pPr>
             <a:r>
               <a:rPr sz="1600" b="1">
@@ -17115,6 +17444,11 @@
               <a:spcAft>
                 <a:spcPts val="600"/>
               </a:spcAft>
+              <a:defRPr>
+                <a:solidFill>
+                  <a:srgbClr val="1A1D23"/>
+                </a:solidFill>
+              </a:defRPr>
             </a:pPr>
             <a:r>
               <a:rPr sz="1600" b="1">
@@ -17149,6 +17483,11 @@
               <a:spcAft>
                 <a:spcPts val="600"/>
               </a:spcAft>
+              <a:defRPr>
+                <a:solidFill>
+                  <a:srgbClr val="1A1D23"/>
+                </a:solidFill>
+              </a:defRPr>
             </a:pPr>
             <a:r>
               <a:rPr sz="1600" b="1">
@@ -17376,7 +17715,13 @@
           </a:bodyPr>
           <a:lstStyle/>
           <a:p>
-            <a:pPr algn="l"/>
+            <a:pPr algn="l">
+              <a:defRPr>
+                <a:solidFill>
+                  <a:srgbClr val="1A1D23"/>
+                </a:solidFill>
+              </a:defRPr>
+            </a:pPr>
             <a:r>
               <a:rPr sz="3600" b="1">
                 <a:solidFill>
@@ -17415,6 +17760,11 @@
               <a:spcAft>
                 <a:spcPts val="600"/>
               </a:spcAft>
+              <a:defRPr>
+                <a:solidFill>
+                  <a:srgbClr val="1A1D23"/>
+                </a:solidFill>
+              </a:defRPr>
             </a:pPr>
             <a:r>
               <a:rPr sz="1600" b="1">
@@ -17449,6 +17799,11 @@
               <a:spcAft>
                 <a:spcPts val="600"/>
               </a:spcAft>
+              <a:defRPr>
+                <a:solidFill>
+                  <a:srgbClr val="1A1D23"/>
+                </a:solidFill>
+              </a:defRPr>
             </a:pPr>
             <a:r>
               <a:rPr sz="1600" b="1">
@@ -17483,6 +17838,11 @@
               <a:spcAft>
                 <a:spcPts val="600"/>
               </a:spcAft>
+              <a:defRPr>
+                <a:solidFill>
+                  <a:srgbClr val="1A1D23"/>
+                </a:solidFill>
+              </a:defRPr>
             </a:pPr>
             <a:r>
               <a:rPr sz="1600" b="1">
@@ -17517,6 +17877,11 @@
               <a:spcAft>
                 <a:spcPts val="600"/>
               </a:spcAft>
+              <a:defRPr>
+                <a:solidFill>
+                  <a:srgbClr val="1A1D23"/>
+                </a:solidFill>
+              </a:defRPr>
             </a:pPr>
             <a:r>
               <a:rPr sz="1600" b="1">
@@ -17551,6 +17916,11 @@
               <a:spcAft>
                 <a:spcPts val="600"/>
               </a:spcAft>
+              <a:defRPr>
+                <a:solidFill>
+                  <a:srgbClr val="1A1D23"/>
+                </a:solidFill>
+              </a:defRPr>
             </a:pPr>
             <a:r>
               <a:rPr sz="1600" b="1">
@@ -17778,7 +18148,13 @@
           </a:bodyPr>
           <a:lstStyle/>
           <a:p>
-            <a:pPr algn="l"/>
+            <a:pPr algn="l">
+              <a:defRPr>
+                <a:solidFill>
+                  <a:srgbClr val="1A1D23"/>
+                </a:solidFill>
+              </a:defRPr>
+            </a:pPr>
             <a:r>
               <a:rPr sz="3600" b="1">
                 <a:solidFill>
@@ -18054,7 +18430,13 @@
           </a:bodyPr>
           <a:lstStyle/>
           <a:p>
-            <a:pPr algn="l"/>
+            <a:pPr algn="l">
+              <a:defRPr>
+                <a:solidFill>
+                  <a:srgbClr val="1A1D23"/>
+                </a:solidFill>
+              </a:defRPr>
+            </a:pPr>
             <a:r>
               <a:rPr sz="3600" b="1">
                 <a:solidFill>
@@ -18093,6 +18475,11 @@
               <a:spcAft>
                 <a:spcPts val="600"/>
               </a:spcAft>
+              <a:defRPr>
+                <a:solidFill>
+                  <a:srgbClr val="1A1D23"/>
+                </a:solidFill>
+              </a:defRPr>
             </a:pPr>
             <a:r>
               <a:rPr sz="1600" b="1">
@@ -18127,6 +18514,11 @@
               <a:spcAft>
                 <a:spcPts val="600"/>
               </a:spcAft>
+              <a:defRPr>
+                <a:solidFill>
+                  <a:srgbClr val="1A1D23"/>
+                </a:solidFill>
+              </a:defRPr>
             </a:pPr>
             <a:r>
               <a:rPr sz="1600" b="1">
@@ -18161,6 +18553,11 @@
               <a:spcAft>
                 <a:spcPts val="600"/>
               </a:spcAft>
+              <a:defRPr>
+                <a:solidFill>
+                  <a:srgbClr val="1A1D23"/>
+                </a:solidFill>
+              </a:defRPr>
             </a:pPr>
             <a:r>
               <a:rPr sz="1600" b="1">
@@ -18195,6 +18592,11 @@
               <a:spcAft>
                 <a:spcPts val="600"/>
               </a:spcAft>
+              <a:defRPr>
+                <a:solidFill>
+                  <a:srgbClr val="1A1D23"/>
+                </a:solidFill>
+              </a:defRPr>
             </a:pPr>
             <a:r>
               <a:rPr sz="1600" b="1">
@@ -18229,6 +18631,11 @@
               <a:spcAft>
                 <a:spcPts val="600"/>
               </a:spcAft>
+              <a:defRPr>
+                <a:solidFill>
+                  <a:srgbClr val="1A1D23"/>
+                </a:solidFill>
+              </a:defRPr>
             </a:pPr>
             <a:r>
               <a:rPr sz="1600" b="1">
@@ -18456,7 +18863,13 @@
           </a:bodyPr>
           <a:lstStyle/>
           <a:p>
-            <a:pPr algn="l"/>
+            <a:pPr algn="l">
+              <a:defRPr>
+                <a:solidFill>
+                  <a:srgbClr val="1A1D23"/>
+                </a:solidFill>
+              </a:defRPr>
+            </a:pPr>
             <a:r>
               <a:rPr sz="3600" b="1">
                 <a:solidFill>
@@ -18495,6 +18908,11 @@
               <a:spcAft>
                 <a:spcPts val="600"/>
               </a:spcAft>
+              <a:defRPr>
+                <a:solidFill>
+                  <a:srgbClr val="1A1D23"/>
+                </a:solidFill>
+              </a:defRPr>
             </a:pPr>
             <a:r>
               <a:rPr sz="1600" b="1">
@@ -18529,6 +18947,11 @@
               <a:spcAft>
                 <a:spcPts val="600"/>
               </a:spcAft>
+              <a:defRPr>
+                <a:solidFill>
+                  <a:srgbClr val="1A1D23"/>
+                </a:solidFill>
+              </a:defRPr>
             </a:pPr>
             <a:r>
               <a:rPr sz="1600" b="1">
@@ -18563,6 +18986,11 @@
               <a:spcAft>
                 <a:spcPts val="600"/>
               </a:spcAft>
+              <a:defRPr>
+                <a:solidFill>
+                  <a:srgbClr val="1A1D23"/>
+                </a:solidFill>
+              </a:defRPr>
             </a:pPr>
             <a:r>
               <a:rPr sz="1600" b="1">
@@ -18597,6 +19025,11 @@
               <a:spcAft>
                 <a:spcPts val="600"/>
               </a:spcAft>
+              <a:defRPr>
+                <a:solidFill>
+                  <a:srgbClr val="1A1D23"/>
+                </a:solidFill>
+              </a:defRPr>
             </a:pPr>
             <a:r>
               <a:rPr sz="1600" b="1">
@@ -18631,6 +19064,11 @@
               <a:spcAft>
                 <a:spcPts val="600"/>
               </a:spcAft>
+              <a:defRPr>
+                <a:solidFill>
+                  <a:srgbClr val="1A1D23"/>
+                </a:solidFill>
+              </a:defRPr>
             </a:pPr>
             <a:r>
               <a:rPr sz="1600" b="1">
@@ -18858,7 +19296,13 @@
           </a:bodyPr>
           <a:lstStyle/>
           <a:p>
-            <a:pPr algn="l"/>
+            <a:pPr algn="l">
+              <a:defRPr>
+                <a:solidFill>
+                  <a:srgbClr val="1A1D23"/>
+                </a:solidFill>
+              </a:defRPr>
+            </a:pPr>
             <a:r>
               <a:rPr sz="3600" b="1">
                 <a:solidFill>
@@ -18897,6 +19341,11 @@
               <a:spcAft>
                 <a:spcPts val="600"/>
               </a:spcAft>
+              <a:defRPr>
+                <a:solidFill>
+                  <a:srgbClr val="1A1D23"/>
+                </a:solidFill>
+              </a:defRPr>
             </a:pPr>
             <a:r>
               <a:rPr sz="1600" b="1">
@@ -18931,6 +19380,11 @@
               <a:spcAft>
                 <a:spcPts val="600"/>
               </a:spcAft>
+              <a:defRPr>
+                <a:solidFill>
+                  <a:srgbClr val="1A1D23"/>
+                </a:solidFill>
+              </a:defRPr>
             </a:pPr>
             <a:r>
               <a:rPr sz="1600" b="1">
@@ -18965,6 +19419,11 @@
               <a:spcAft>
                 <a:spcPts val="600"/>
               </a:spcAft>
+              <a:defRPr>
+                <a:solidFill>
+                  <a:srgbClr val="1A1D23"/>
+                </a:solidFill>
+              </a:defRPr>
             </a:pPr>
             <a:r>
               <a:rPr sz="1600" b="1">
@@ -18999,6 +19458,11 @@
               <a:spcAft>
                 <a:spcPts val="600"/>
               </a:spcAft>
+              <a:defRPr>
+                <a:solidFill>
+                  <a:srgbClr val="1A1D23"/>
+                </a:solidFill>
+              </a:defRPr>
             </a:pPr>
             <a:r>
               <a:rPr sz="1600" b="1">
@@ -19033,6 +19497,11 @@
               <a:spcAft>
                 <a:spcPts val="600"/>
               </a:spcAft>
+              <a:defRPr>
+                <a:solidFill>
+                  <a:srgbClr val="1A1D23"/>
+                </a:solidFill>
+              </a:defRPr>
             </a:pPr>
             <a:r>
               <a:rPr sz="1600" b="1">
@@ -19260,7 +19729,13 @@
           </a:bodyPr>
           <a:lstStyle/>
           <a:p>
-            <a:pPr algn="l"/>
+            <a:pPr algn="l">
+              <a:defRPr>
+                <a:solidFill>
+                  <a:srgbClr val="1A1D23"/>
+                </a:solidFill>
+              </a:defRPr>
+            </a:pPr>
             <a:r>
               <a:rPr sz="3600" b="1">
                 <a:solidFill>
@@ -19299,6 +19774,11 @@
               <a:spcAft>
                 <a:spcPts val="600"/>
               </a:spcAft>
+              <a:defRPr>
+                <a:solidFill>
+                  <a:srgbClr val="1A1D23"/>
+                </a:solidFill>
+              </a:defRPr>
             </a:pPr>
             <a:r>
               <a:rPr sz="1600" b="1">
@@ -19333,6 +19813,11 @@
               <a:spcAft>
                 <a:spcPts val="600"/>
               </a:spcAft>
+              <a:defRPr>
+                <a:solidFill>
+                  <a:srgbClr val="1A1D23"/>
+                </a:solidFill>
+              </a:defRPr>
             </a:pPr>
             <a:r>
               <a:rPr sz="1600" b="1">
@@ -19367,6 +19852,11 @@
               <a:spcAft>
                 <a:spcPts val="600"/>
               </a:spcAft>
+              <a:defRPr>
+                <a:solidFill>
+                  <a:srgbClr val="1A1D23"/>
+                </a:solidFill>
+              </a:defRPr>
             </a:pPr>
             <a:r>
               <a:rPr sz="1600" b="1">
@@ -19401,6 +19891,11 @@
               <a:spcAft>
                 <a:spcPts val="600"/>
               </a:spcAft>
+              <a:defRPr>
+                <a:solidFill>
+                  <a:srgbClr val="1A1D23"/>
+                </a:solidFill>
+              </a:defRPr>
             </a:pPr>
             <a:r>
               <a:rPr sz="1600" b="1">
@@ -19435,6 +19930,11 @@
               <a:spcAft>
                 <a:spcPts val="600"/>
               </a:spcAft>
+              <a:defRPr>
+                <a:solidFill>
+                  <a:srgbClr val="1A1D23"/>
+                </a:solidFill>
+              </a:defRPr>
             </a:pPr>
             <a:r>
               <a:rPr sz="1600" b="1">
@@ -19662,7 +20162,13 @@
           </a:bodyPr>
           <a:lstStyle/>
           <a:p>
-            <a:pPr algn="l"/>
+            <a:pPr algn="l">
+              <a:defRPr>
+                <a:solidFill>
+                  <a:srgbClr val="1A1D23"/>
+                </a:solidFill>
+              </a:defRPr>
+            </a:pPr>
             <a:r>
               <a:rPr sz="3600" b="1">
                 <a:solidFill>
@@ -19697,7 +20203,13 @@
           </a:bodyPr>
           <a:lstStyle/>
           <a:p>
-            <a:pPr algn="l"/>
+            <a:pPr algn="l">
+              <a:defRPr>
+                <a:solidFill>
+                  <a:srgbClr val="64748B"/>
+                </a:solidFill>
+              </a:defRPr>
+            </a:pPr>
             <a:r>
               <a:rPr sz="1800" i="1">
                 <a:solidFill>
@@ -19756,7 +20268,13 @@
           </a:bodyPr>
           <a:lstStyle/>
           <a:p>
-            <a:pPr algn="ctr"/>
+            <a:pPr algn="ctr">
+              <a:defRPr>
+                <a:solidFill>
+                  <a:srgbClr val="64748B"/>
+                </a:solidFill>
+              </a:defRPr>
+            </a:pPr>
             <a:r>
               <a:rPr sz="1000" b="0" i="1">
                 <a:solidFill>
@@ -19965,7 +20483,13 @@
           </a:bodyPr>
           <a:lstStyle/>
           <a:p>
-            <a:pPr algn="l"/>
+            <a:pPr algn="l">
+              <a:defRPr>
+                <a:solidFill>
+                  <a:srgbClr val="00D4A8"/>
+                </a:solidFill>
+              </a:defRPr>
+            </a:pPr>
             <a:r>
               <a:rPr sz="1800" b="1" i="0">
                 <a:solidFill>
@@ -20000,7 +20524,13 @@
           </a:bodyPr>
           <a:lstStyle/>
           <a:p>
-            <a:pPr algn="l"/>
+            <a:pPr algn="l">
+              <a:defRPr>
+                <a:solidFill>
+                  <a:srgbClr val="FFFFFF"/>
+                </a:solidFill>
+              </a:defRPr>
+            </a:pPr>
             <a:r>
               <a:rPr sz="4800" b="1">
                 <a:solidFill>
@@ -20035,7 +20565,13 @@
           </a:bodyPr>
           <a:lstStyle/>
           <a:p>
-            <a:pPr algn="l"/>
+            <a:pPr algn="l">
+              <a:defRPr>
+                <a:solidFill>
+                  <a:srgbClr val="C3EFE3"/>
+                </a:solidFill>
+              </a:defRPr>
+            </a:pPr>
             <a:r>
               <a:rPr sz="2000" i="0">
                 <a:solidFill>
@@ -20244,7 +20780,13 @@
           </a:bodyPr>
           <a:lstStyle/>
           <a:p>
-            <a:pPr algn="l"/>
+            <a:pPr algn="l">
+              <a:defRPr>
+                <a:solidFill>
+                  <a:srgbClr val="1A1D23"/>
+                </a:solidFill>
+              </a:defRPr>
+            </a:pPr>
             <a:r>
               <a:rPr sz="3600" b="1">
                 <a:solidFill>
@@ -20303,7 +20845,13 @@
           </a:bodyPr>
           <a:lstStyle/>
           <a:p>
-            <a:pPr algn="ctr"/>
+            <a:pPr algn="ctr">
+              <a:defRPr>
+                <a:solidFill>
+                  <a:srgbClr val="64748B"/>
+                </a:solidFill>
+              </a:defRPr>
+            </a:pPr>
             <a:r>
               <a:rPr sz="1000" b="0" i="1">
                 <a:solidFill>
@@ -20512,7 +21060,13 @@
           </a:bodyPr>
           <a:lstStyle/>
           <a:p>
-            <a:pPr algn="l"/>
+            <a:pPr algn="l">
+              <a:defRPr>
+                <a:solidFill>
+                  <a:srgbClr val="1A1D23"/>
+                </a:solidFill>
+              </a:defRPr>
+            </a:pPr>
             <a:r>
               <a:rPr sz="3600" b="1">
                 <a:solidFill>
@@ -20547,7 +21101,13 @@
           </a:bodyPr>
           <a:lstStyle/>
           <a:p>
-            <a:pPr algn="l"/>
+            <a:pPr algn="l">
+              <a:defRPr>
+                <a:solidFill>
+                  <a:srgbClr val="64748B"/>
+                </a:solidFill>
+              </a:defRPr>
+            </a:pPr>
             <a:r>
               <a:rPr sz="1800" i="1">
                 <a:solidFill>
@@ -20586,6 +21146,11 @@
               <a:spcAft>
                 <a:spcPts val="600"/>
               </a:spcAft>
+              <a:defRPr>
+                <a:solidFill>
+                  <a:srgbClr val="1A1D23"/>
+                </a:solidFill>
+              </a:defRPr>
             </a:pPr>
             <a:r>
               <a:rPr sz="1600" b="1">
@@ -20620,6 +21185,11 @@
               <a:spcAft>
                 <a:spcPts val="600"/>
               </a:spcAft>
+              <a:defRPr>
+                <a:solidFill>
+                  <a:srgbClr val="1A1D23"/>
+                </a:solidFill>
+              </a:defRPr>
             </a:pPr>
             <a:r>
               <a:rPr sz="1600" b="1">
@@ -20654,6 +21224,11 @@
               <a:spcAft>
                 <a:spcPts val="600"/>
               </a:spcAft>
+              <a:defRPr>
+                <a:solidFill>
+                  <a:srgbClr val="1A1D23"/>
+                </a:solidFill>
+              </a:defRPr>
             </a:pPr>
             <a:r>
               <a:rPr sz="1600" b="1">
@@ -20688,6 +21263,11 @@
               <a:spcAft>
                 <a:spcPts val="600"/>
               </a:spcAft>
+              <a:defRPr>
+                <a:solidFill>
+                  <a:srgbClr val="1A1D23"/>
+                </a:solidFill>
+              </a:defRPr>
             </a:pPr>
             <a:r>
               <a:rPr sz="1600" b="1">
@@ -20722,6 +21302,11 @@
               <a:spcAft>
                 <a:spcPts val="600"/>
               </a:spcAft>
+              <a:defRPr>
+                <a:solidFill>
+                  <a:srgbClr val="1A1D23"/>
+                </a:solidFill>
+              </a:defRPr>
             </a:pPr>
             <a:r>
               <a:rPr sz="1600" b="1">
@@ -20949,7 +21534,13 @@
           </a:bodyPr>
           <a:lstStyle/>
           <a:p>
-            <a:pPr algn="l"/>
+            <a:pPr algn="l">
+              <a:defRPr>
+                <a:solidFill>
+                  <a:srgbClr val="1A1D23"/>
+                </a:solidFill>
+              </a:defRPr>
+            </a:pPr>
             <a:r>
               <a:rPr sz="3600" b="1">
                 <a:solidFill>
@@ -20988,6 +21579,11 @@
               <a:spcAft>
                 <a:spcPts val="600"/>
               </a:spcAft>
+              <a:defRPr>
+                <a:solidFill>
+                  <a:srgbClr val="1A1D23"/>
+                </a:solidFill>
+              </a:defRPr>
             </a:pPr>
             <a:r>
               <a:rPr sz="1600" b="1">
@@ -21022,6 +21618,11 @@
               <a:spcAft>
                 <a:spcPts val="600"/>
               </a:spcAft>
+              <a:defRPr>
+                <a:solidFill>
+                  <a:srgbClr val="1A1D23"/>
+                </a:solidFill>
+              </a:defRPr>
             </a:pPr>
             <a:r>
               <a:rPr sz="1600" b="1">
@@ -21056,6 +21657,11 @@
               <a:spcAft>
                 <a:spcPts val="600"/>
               </a:spcAft>
+              <a:defRPr>
+                <a:solidFill>
+                  <a:srgbClr val="1A1D23"/>
+                </a:solidFill>
+              </a:defRPr>
             </a:pPr>
             <a:r>
               <a:rPr sz="1600" b="1">
@@ -21090,6 +21696,11 @@
               <a:spcAft>
                 <a:spcPts val="600"/>
               </a:spcAft>
+              <a:defRPr>
+                <a:solidFill>
+                  <a:srgbClr val="1A1D23"/>
+                </a:solidFill>
+              </a:defRPr>
             </a:pPr>
             <a:r>
               <a:rPr sz="1600" b="1">
@@ -21124,6 +21735,11 @@
               <a:spcAft>
                 <a:spcPts val="600"/>
               </a:spcAft>
+              <a:defRPr>
+                <a:solidFill>
+                  <a:srgbClr val="1A1D23"/>
+                </a:solidFill>
+              </a:defRPr>
             </a:pPr>
             <a:r>
               <a:rPr sz="1600" b="1">
@@ -21351,7 +21967,13 @@
           </a:bodyPr>
           <a:lstStyle/>
           <a:p>
-            <a:pPr algn="l"/>
+            <a:pPr algn="l">
+              <a:defRPr>
+                <a:solidFill>
+                  <a:srgbClr val="1A1D23"/>
+                </a:solidFill>
+              </a:defRPr>
+            </a:pPr>
             <a:r>
               <a:rPr sz="3600" b="1">
                 <a:solidFill>
@@ -21390,6 +22012,11 @@
               <a:spcAft>
                 <a:spcPts val="600"/>
               </a:spcAft>
+              <a:defRPr>
+                <a:solidFill>
+                  <a:srgbClr val="1A1D23"/>
+                </a:solidFill>
+              </a:defRPr>
             </a:pPr>
             <a:r>
               <a:rPr sz="1600" b="1">
@@ -21424,6 +22051,11 @@
               <a:spcAft>
                 <a:spcPts val="600"/>
               </a:spcAft>
+              <a:defRPr>
+                <a:solidFill>
+                  <a:srgbClr val="1A1D23"/>
+                </a:solidFill>
+              </a:defRPr>
             </a:pPr>
             <a:r>
               <a:rPr sz="1600" b="1">
@@ -21458,6 +22090,11 @@
               <a:spcAft>
                 <a:spcPts val="600"/>
               </a:spcAft>
+              <a:defRPr>
+                <a:solidFill>
+                  <a:srgbClr val="1A1D23"/>
+                </a:solidFill>
+              </a:defRPr>
             </a:pPr>
             <a:r>
               <a:rPr sz="1600" b="1">
@@ -21492,6 +22129,11 @@
               <a:spcAft>
                 <a:spcPts val="600"/>
               </a:spcAft>
+              <a:defRPr>
+                <a:solidFill>
+                  <a:srgbClr val="1A1D23"/>
+                </a:solidFill>
+              </a:defRPr>
             </a:pPr>
             <a:r>
               <a:rPr sz="1600" b="1">
@@ -21526,6 +22168,11 @@
               <a:spcAft>
                 <a:spcPts val="600"/>
               </a:spcAft>
+              <a:defRPr>
+                <a:solidFill>
+                  <a:srgbClr val="1A1D23"/>
+                </a:solidFill>
+              </a:defRPr>
             </a:pPr>
             <a:r>
               <a:rPr sz="1600" b="1">
@@ -21753,7 +22400,13 @@
           </a:bodyPr>
           <a:lstStyle/>
           <a:p>
-            <a:pPr algn="l"/>
+            <a:pPr algn="l">
+              <a:defRPr>
+                <a:solidFill>
+                  <a:srgbClr val="1A1D23"/>
+                </a:solidFill>
+              </a:defRPr>
+            </a:pPr>
             <a:r>
               <a:rPr sz="3600" b="1">
                 <a:solidFill>
@@ -21788,7 +22441,13 @@
           </a:bodyPr>
           <a:lstStyle/>
           <a:p>
-            <a:pPr algn="l"/>
+            <a:pPr algn="l">
+              <a:defRPr>
+                <a:solidFill>
+                  <a:srgbClr val="64748B"/>
+                </a:solidFill>
+              </a:defRPr>
+            </a:pPr>
             <a:r>
               <a:rPr sz="1800" i="1">
                 <a:solidFill>
@@ -21827,6 +22486,11 @@
               <a:spcAft>
                 <a:spcPts val="600"/>
               </a:spcAft>
+              <a:defRPr>
+                <a:solidFill>
+                  <a:srgbClr val="1A1D23"/>
+                </a:solidFill>
+              </a:defRPr>
             </a:pPr>
             <a:r>
               <a:rPr sz="1600" b="1">
@@ -21861,6 +22525,11 @@
               <a:spcAft>
                 <a:spcPts val="600"/>
               </a:spcAft>
+              <a:defRPr>
+                <a:solidFill>
+                  <a:srgbClr val="1A1D23"/>
+                </a:solidFill>
+              </a:defRPr>
             </a:pPr>
             <a:r>
               <a:rPr sz="1600" b="1">
@@ -21895,6 +22564,11 @@
               <a:spcAft>
                 <a:spcPts val="600"/>
               </a:spcAft>
+              <a:defRPr>
+                <a:solidFill>
+                  <a:srgbClr val="1A1D23"/>
+                </a:solidFill>
+              </a:defRPr>
             </a:pPr>
             <a:r>
               <a:rPr sz="1600" b="1">
@@ -21929,6 +22603,11 @@
               <a:spcAft>
                 <a:spcPts val="600"/>
               </a:spcAft>
+              <a:defRPr>
+                <a:solidFill>
+                  <a:srgbClr val="1A1D23"/>
+                </a:solidFill>
+              </a:defRPr>
             </a:pPr>
             <a:r>
               <a:rPr sz="1600" b="1">
@@ -21963,6 +22642,11 @@
               <a:spcAft>
                 <a:spcPts val="600"/>
               </a:spcAft>
+              <a:defRPr>
+                <a:solidFill>
+                  <a:srgbClr val="1A1D23"/>
+                </a:solidFill>
+              </a:defRPr>
             </a:pPr>
             <a:r>
               <a:rPr sz="1600" b="1">
@@ -21997,6 +22681,11 @@
               <a:spcAft>
                 <a:spcPts val="600"/>
               </a:spcAft>
+              <a:defRPr>
+                <a:solidFill>
+                  <a:srgbClr val="1A1D23"/>
+                </a:solidFill>
+              </a:defRPr>
             </a:pPr>
             <a:r>
               <a:rPr sz="1600" b="1">
@@ -22031,6 +22720,11 @@
               <a:spcAft>
                 <a:spcPts val="600"/>
               </a:spcAft>
+              <a:defRPr>
+                <a:solidFill>
+                  <a:srgbClr val="1A1D23"/>
+                </a:solidFill>
+              </a:defRPr>
             </a:pPr>
             <a:r>
               <a:rPr sz="1600" b="1">
@@ -22065,6 +22759,11 @@
               <a:spcAft>
                 <a:spcPts val="600"/>
               </a:spcAft>
+              <a:defRPr>
+                <a:solidFill>
+                  <a:srgbClr val="1A1D23"/>
+                </a:solidFill>
+              </a:defRPr>
             </a:pPr>
             <a:r>
               <a:rPr sz="1600" b="1">
@@ -22099,6 +22798,11 @@
               <a:spcAft>
                 <a:spcPts val="600"/>
               </a:spcAft>
+              <a:defRPr>
+                <a:solidFill>
+                  <a:srgbClr val="1A1D23"/>
+                </a:solidFill>
+              </a:defRPr>
             </a:pPr>
             <a:r>
               <a:rPr sz="1600" b="1">
@@ -22326,7 +23030,13 @@
           </a:bodyPr>
           <a:lstStyle/>
           <a:p>
-            <a:pPr algn="l"/>
+            <a:pPr algn="l">
+              <a:defRPr>
+                <a:solidFill>
+                  <a:srgbClr val="1A1D23"/>
+                </a:solidFill>
+              </a:defRPr>
+            </a:pPr>
             <a:r>
               <a:rPr sz="3600" b="1">
                 <a:solidFill>
@@ -22365,6 +23075,11 @@
               <a:spcAft>
                 <a:spcPts val="600"/>
               </a:spcAft>
+              <a:defRPr>
+                <a:solidFill>
+                  <a:srgbClr val="1A1D23"/>
+                </a:solidFill>
+              </a:defRPr>
             </a:pPr>
             <a:r>
               <a:rPr sz="1600" b="1">
@@ -22399,6 +23114,11 @@
               <a:spcAft>
                 <a:spcPts val="600"/>
               </a:spcAft>
+              <a:defRPr>
+                <a:solidFill>
+                  <a:srgbClr val="1A1D23"/>
+                </a:solidFill>
+              </a:defRPr>
             </a:pPr>
             <a:r>
               <a:rPr sz="1600" b="1">
@@ -22433,6 +23153,11 @@
               <a:spcAft>
                 <a:spcPts val="600"/>
               </a:spcAft>
+              <a:defRPr>
+                <a:solidFill>
+                  <a:srgbClr val="1A1D23"/>
+                </a:solidFill>
+              </a:defRPr>
             </a:pPr>
             <a:r>
               <a:rPr sz="1600" b="1">
@@ -22467,6 +23192,11 @@
               <a:spcAft>
                 <a:spcPts val="600"/>
               </a:spcAft>
+              <a:defRPr>
+                <a:solidFill>
+                  <a:srgbClr val="1A1D23"/>
+                </a:solidFill>
+              </a:defRPr>
             </a:pPr>
             <a:r>
               <a:rPr sz="1600" b="1">
@@ -22501,6 +23231,11 @@
               <a:spcAft>
                 <a:spcPts val="600"/>
               </a:spcAft>
+              <a:defRPr>
+                <a:solidFill>
+                  <a:srgbClr val="1A1D23"/>
+                </a:solidFill>
+              </a:defRPr>
             </a:pPr>
             <a:r>
               <a:rPr sz="1600" b="1">
@@ -22728,7 +23463,13 @@
           </a:bodyPr>
           <a:lstStyle/>
           <a:p>
-            <a:pPr algn="l"/>
+            <a:pPr algn="l">
+              <a:defRPr>
+                <a:solidFill>
+                  <a:srgbClr val="1A1D23"/>
+                </a:solidFill>
+              </a:defRPr>
+            </a:pPr>
             <a:r>
               <a:rPr sz="3600" b="1">
                 <a:solidFill>
@@ -22767,6 +23508,11 @@
               <a:spcAft>
                 <a:spcPts val="600"/>
               </a:spcAft>
+              <a:defRPr>
+                <a:solidFill>
+                  <a:srgbClr val="1A1D23"/>
+                </a:solidFill>
+              </a:defRPr>
             </a:pPr>
             <a:r>
               <a:rPr sz="1600" b="1">
@@ -22801,6 +23547,11 @@
               <a:spcAft>
                 <a:spcPts val="600"/>
               </a:spcAft>
+              <a:defRPr>
+                <a:solidFill>
+                  <a:srgbClr val="1A1D23"/>
+                </a:solidFill>
+              </a:defRPr>
             </a:pPr>
             <a:r>
               <a:rPr sz="1600" b="1">
@@ -22835,6 +23586,11 @@
               <a:spcAft>
                 <a:spcPts val="600"/>
               </a:spcAft>
+              <a:defRPr>
+                <a:solidFill>
+                  <a:srgbClr val="1A1D23"/>
+                </a:solidFill>
+              </a:defRPr>
             </a:pPr>
             <a:r>
               <a:rPr sz="1600" b="1">
@@ -22869,6 +23625,11 @@
               <a:spcAft>
                 <a:spcPts val="600"/>
               </a:spcAft>
+              <a:defRPr>
+                <a:solidFill>
+                  <a:srgbClr val="1A1D23"/>
+                </a:solidFill>
+              </a:defRPr>
             </a:pPr>
             <a:r>
               <a:rPr sz="1600" b="1">
@@ -22903,6 +23664,11 @@
               <a:spcAft>
                 <a:spcPts val="600"/>
               </a:spcAft>
+              <a:defRPr>
+                <a:solidFill>
+                  <a:srgbClr val="1A1D23"/>
+                </a:solidFill>
+              </a:defRPr>
             </a:pPr>
             <a:r>
               <a:rPr sz="1600" b="1">
@@ -23130,7 +23896,13 @@
           </a:bodyPr>
           <a:lstStyle/>
           <a:p>
-            <a:pPr algn="l"/>
+            <a:pPr algn="l">
+              <a:defRPr>
+                <a:solidFill>
+                  <a:srgbClr val="1A1D23"/>
+                </a:solidFill>
+              </a:defRPr>
+            </a:pPr>
             <a:r>
               <a:rPr sz="3600" b="1">
                 <a:solidFill>
@@ -23165,7 +23937,13 @@
           </a:bodyPr>
           <a:lstStyle/>
           <a:p>
-            <a:pPr algn="l"/>
+            <a:pPr algn="l">
+              <a:defRPr>
+                <a:solidFill>
+                  <a:srgbClr val="64748B"/>
+                </a:solidFill>
+              </a:defRPr>
+            </a:pPr>
             <a:r>
               <a:rPr sz="1800" i="1">
                 <a:solidFill>
@@ -24122,7 +24900,13 @@
           </a:bodyPr>
           <a:lstStyle/>
           <a:p>
-            <a:pPr algn="l"/>
+            <a:pPr algn="l">
+              <a:defRPr>
+                <a:solidFill>
+                  <a:srgbClr val="1A1D23"/>
+                </a:solidFill>
+              </a:defRPr>
+            </a:pPr>
             <a:r>
               <a:rPr sz="3600" b="1">
                 <a:solidFill>
@@ -24247,7 +25031,13 @@
           </a:bodyPr>
           <a:lstStyle/>
           <a:p>
-            <a:pPr algn="ctr"/>
+            <a:pPr algn="ctr">
+              <a:defRPr>
+                <a:solidFill>
+                  <a:srgbClr val="FFFFFF"/>
+                </a:solidFill>
+              </a:defRPr>
+            </a:pPr>
             <a:r>
               <a:rPr sz="1500" b="1" i="0">
                 <a:solidFill>
@@ -24515,7 +25305,13 @@
           </a:bodyPr>
           <a:lstStyle/>
           <a:p>
-            <a:pPr algn="ctr"/>
+            <a:pPr algn="ctr">
+              <a:defRPr>
+                <a:solidFill>
+                  <a:srgbClr val="FFFFFF"/>
+                </a:solidFill>
+              </a:defRPr>
+            </a:pPr>
             <a:r>
               <a:rPr sz="1500" b="1" i="0">
                 <a:solidFill>
@@ -24867,7 +25663,13 @@
           </a:bodyPr>
           <a:lstStyle/>
           <a:p>
-            <a:pPr algn="l"/>
+            <a:pPr algn="l">
+              <a:defRPr>
+                <a:solidFill>
+                  <a:srgbClr val="00D4A8"/>
+                </a:solidFill>
+              </a:defRPr>
+            </a:pPr>
             <a:r>
               <a:rPr sz="1800" b="1" i="0">
                 <a:solidFill>
@@ -24902,7 +25704,13 @@
           </a:bodyPr>
           <a:lstStyle/>
           <a:p>
-            <a:pPr algn="l"/>
+            <a:pPr algn="l">
+              <a:defRPr>
+                <a:solidFill>
+                  <a:srgbClr val="FFFFFF"/>
+                </a:solidFill>
+              </a:defRPr>
+            </a:pPr>
             <a:r>
               <a:rPr sz="4800" b="1">
                 <a:solidFill>
@@ -24937,7 +25745,13 @@
           </a:bodyPr>
           <a:lstStyle/>
           <a:p>
-            <a:pPr algn="l"/>
+            <a:pPr algn="l">
+              <a:defRPr>
+                <a:solidFill>
+                  <a:srgbClr val="C3EFE3"/>
+                </a:solidFill>
+              </a:defRPr>
+            </a:pPr>
             <a:r>
               <a:rPr sz="2000" i="0">
                 <a:solidFill>
@@ -25146,7 +25960,13 @@
           </a:bodyPr>
           <a:lstStyle/>
           <a:p>
-            <a:pPr algn="l"/>
+            <a:pPr algn="l">
+              <a:defRPr>
+                <a:solidFill>
+                  <a:srgbClr val="1A1D23"/>
+                </a:solidFill>
+              </a:defRPr>
+            </a:pPr>
             <a:r>
               <a:rPr sz="3600" b="1">
                 <a:solidFill>
@@ -25271,7 +26091,13 @@
           </a:bodyPr>
           <a:lstStyle/>
           <a:p>
-            <a:pPr algn="ctr"/>
+            <a:pPr algn="ctr">
+              <a:defRPr>
+                <a:solidFill>
+                  <a:srgbClr val="FFFFFF"/>
+                </a:solidFill>
+              </a:defRPr>
+            </a:pPr>
             <a:r>
               <a:rPr sz="1500" b="1" i="0">
                 <a:solidFill>
@@ -25539,7 +26365,13 @@
           </a:bodyPr>
           <a:lstStyle/>
           <a:p>
-            <a:pPr algn="ctr"/>
+            <a:pPr algn="ctr">
+              <a:defRPr>
+                <a:solidFill>
+                  <a:srgbClr val="FFFFFF"/>
+                </a:solidFill>
+              </a:defRPr>
+            </a:pPr>
             <a:r>
               <a:rPr sz="1500" b="1" i="0">
                 <a:solidFill>
@@ -25891,7 +26723,13 @@
           </a:bodyPr>
           <a:lstStyle/>
           <a:p>
-            <a:pPr algn="l"/>
+            <a:pPr algn="l">
+              <a:defRPr>
+                <a:solidFill>
+                  <a:srgbClr val="1A1D23"/>
+                </a:solidFill>
+              </a:defRPr>
+            </a:pPr>
             <a:r>
               <a:rPr sz="3600" b="1">
                 <a:solidFill>
@@ -25930,6 +26768,11 @@
               <a:spcAft>
                 <a:spcPts val="600"/>
               </a:spcAft>
+              <a:defRPr>
+                <a:solidFill>
+                  <a:srgbClr val="1A1D23"/>
+                </a:solidFill>
+              </a:defRPr>
             </a:pPr>
             <a:r>
               <a:rPr sz="1600" b="1">
@@ -25964,6 +26807,11 @@
               <a:spcAft>
                 <a:spcPts val="600"/>
               </a:spcAft>
+              <a:defRPr>
+                <a:solidFill>
+                  <a:srgbClr val="1A1D23"/>
+                </a:solidFill>
+              </a:defRPr>
             </a:pPr>
             <a:r>
               <a:rPr sz="1600" b="1">
@@ -25998,6 +26846,11 @@
               <a:spcAft>
                 <a:spcPts val="600"/>
               </a:spcAft>
+              <a:defRPr>
+                <a:solidFill>
+                  <a:srgbClr val="1A1D23"/>
+                </a:solidFill>
+              </a:defRPr>
             </a:pPr>
             <a:r>
               <a:rPr sz="1600" b="1">
@@ -26032,6 +26885,11 @@
               <a:spcAft>
                 <a:spcPts val="600"/>
               </a:spcAft>
+              <a:defRPr>
+                <a:solidFill>
+                  <a:srgbClr val="1A1D23"/>
+                </a:solidFill>
+              </a:defRPr>
             </a:pPr>
             <a:r>
               <a:rPr sz="1600" b="1">
@@ -26066,6 +26924,11 @@
               <a:spcAft>
                 <a:spcPts val="600"/>
               </a:spcAft>
+              <a:defRPr>
+                <a:solidFill>
+                  <a:srgbClr val="1A1D23"/>
+                </a:solidFill>
+              </a:defRPr>
             </a:pPr>
             <a:r>
               <a:rPr sz="1600" b="1">
@@ -26293,7 +27156,13 @@
           </a:bodyPr>
           <a:lstStyle/>
           <a:p>
-            <a:pPr algn="l"/>
+            <a:pPr algn="l">
+              <a:defRPr>
+                <a:solidFill>
+                  <a:srgbClr val="1A1D23"/>
+                </a:solidFill>
+              </a:defRPr>
+            </a:pPr>
             <a:r>
               <a:rPr sz="3600" b="1">
                 <a:solidFill>
@@ -26352,7 +27221,13 @@
           </a:bodyPr>
           <a:lstStyle/>
           <a:p>
-            <a:pPr algn="ctr"/>
+            <a:pPr algn="ctr">
+              <a:defRPr>
+                <a:solidFill>
+                  <a:srgbClr val="64748B"/>
+                </a:solidFill>
+              </a:defRPr>
+            </a:pPr>
             <a:r>
               <a:rPr sz="1000" b="0" i="1">
                 <a:solidFill>
@@ -26561,7 +27436,13 @@
           </a:bodyPr>
           <a:lstStyle/>
           <a:p>
-            <a:pPr algn="l"/>
+            <a:pPr algn="l">
+              <a:defRPr>
+                <a:solidFill>
+                  <a:srgbClr val="1A1D23"/>
+                </a:solidFill>
+              </a:defRPr>
+            </a:pPr>
             <a:r>
               <a:rPr sz="3600" b="1">
                 <a:solidFill>
@@ -26620,7 +27501,13 @@
           </a:bodyPr>
           <a:lstStyle/>
           <a:p>
-            <a:pPr algn="ctr"/>
+            <a:pPr algn="ctr">
+              <a:defRPr>
+                <a:solidFill>
+                  <a:srgbClr val="64748B"/>
+                </a:solidFill>
+              </a:defRPr>
+            </a:pPr>
             <a:r>
               <a:rPr sz="1000" b="0" i="1">
                 <a:solidFill>
@@ -26829,7 +27716,13 @@
           </a:bodyPr>
           <a:lstStyle/>
           <a:p>
-            <a:pPr algn="l"/>
+            <a:pPr algn="l">
+              <a:defRPr>
+                <a:solidFill>
+                  <a:srgbClr val="1A1D23"/>
+                </a:solidFill>
+              </a:defRPr>
+            </a:pPr>
             <a:r>
               <a:rPr sz="3600" b="1">
                 <a:solidFill>
@@ -26868,6 +27761,11 @@
               <a:spcAft>
                 <a:spcPts val="600"/>
               </a:spcAft>
+              <a:defRPr>
+                <a:solidFill>
+                  <a:srgbClr val="1A1D23"/>
+                </a:solidFill>
+              </a:defRPr>
             </a:pPr>
             <a:r>
               <a:rPr sz="1600" b="1">
@@ -26902,6 +27800,11 @@
               <a:spcAft>
                 <a:spcPts val="600"/>
               </a:spcAft>
+              <a:defRPr>
+                <a:solidFill>
+                  <a:srgbClr val="1A1D23"/>
+                </a:solidFill>
+              </a:defRPr>
             </a:pPr>
             <a:r>
               <a:rPr sz="1600" b="1">
@@ -26936,6 +27839,11 @@
               <a:spcAft>
                 <a:spcPts val="600"/>
               </a:spcAft>
+              <a:defRPr>
+                <a:solidFill>
+                  <a:srgbClr val="1A1D23"/>
+                </a:solidFill>
+              </a:defRPr>
             </a:pPr>
             <a:r>
               <a:rPr sz="1600" b="1">
@@ -26970,6 +27878,11 @@
               <a:spcAft>
                 <a:spcPts val="600"/>
               </a:spcAft>
+              <a:defRPr>
+                <a:solidFill>
+                  <a:srgbClr val="1A1D23"/>
+                </a:solidFill>
+              </a:defRPr>
             </a:pPr>
             <a:r>
               <a:rPr sz="1600" b="1">
@@ -27004,6 +27917,11 @@
               <a:spcAft>
                 <a:spcPts val="600"/>
               </a:spcAft>
+              <a:defRPr>
+                <a:solidFill>
+                  <a:srgbClr val="1A1D23"/>
+                </a:solidFill>
+              </a:defRPr>
             </a:pPr>
             <a:r>
               <a:rPr sz="1600" b="1">
@@ -27231,7 +28149,13 @@
           </a:bodyPr>
           <a:lstStyle/>
           <a:p>
-            <a:pPr algn="l"/>
+            <a:pPr algn="l">
+              <a:defRPr>
+                <a:solidFill>
+                  <a:srgbClr val="1A1D23"/>
+                </a:solidFill>
+              </a:defRPr>
+            </a:pPr>
             <a:r>
               <a:rPr sz="3600" b="1">
                 <a:solidFill>
@@ -27270,6 +28194,11 @@
               <a:spcAft>
                 <a:spcPts val="600"/>
               </a:spcAft>
+              <a:defRPr>
+                <a:solidFill>
+                  <a:srgbClr val="1A1D23"/>
+                </a:solidFill>
+              </a:defRPr>
             </a:pPr>
             <a:r>
               <a:rPr sz="1600" b="1">
@@ -27304,6 +28233,11 @@
               <a:spcAft>
                 <a:spcPts val="600"/>
               </a:spcAft>
+              <a:defRPr>
+                <a:solidFill>
+                  <a:srgbClr val="1A1D23"/>
+                </a:solidFill>
+              </a:defRPr>
             </a:pPr>
             <a:r>
               <a:rPr sz="1600" b="1">
@@ -27338,6 +28272,11 @@
               <a:spcAft>
                 <a:spcPts val="600"/>
               </a:spcAft>
+              <a:defRPr>
+                <a:solidFill>
+                  <a:srgbClr val="1A1D23"/>
+                </a:solidFill>
+              </a:defRPr>
             </a:pPr>
             <a:r>
               <a:rPr sz="1600" b="1">
@@ -27372,6 +28311,11 @@
               <a:spcAft>
                 <a:spcPts val="600"/>
               </a:spcAft>
+              <a:defRPr>
+                <a:solidFill>
+                  <a:srgbClr val="1A1D23"/>
+                </a:solidFill>
+              </a:defRPr>
             </a:pPr>
             <a:r>
               <a:rPr sz="1600" b="1">
@@ -27406,6 +28350,11 @@
               <a:spcAft>
                 <a:spcPts val="600"/>
               </a:spcAft>
+              <a:defRPr>
+                <a:solidFill>
+                  <a:srgbClr val="1A1D23"/>
+                </a:solidFill>
+              </a:defRPr>
             </a:pPr>
             <a:r>
               <a:rPr sz="1600" b="1">
@@ -27633,7 +28582,13 @@
           </a:bodyPr>
           <a:lstStyle/>
           <a:p>
-            <a:pPr algn="l"/>
+            <a:pPr algn="l">
+              <a:defRPr>
+                <a:solidFill>
+                  <a:srgbClr val="1A1D23"/>
+                </a:solidFill>
+              </a:defRPr>
+            </a:pPr>
             <a:r>
               <a:rPr sz="3600" b="1">
                 <a:solidFill>
@@ -27672,6 +28627,11 @@
               <a:spcAft>
                 <a:spcPts val="600"/>
               </a:spcAft>
+              <a:defRPr>
+                <a:solidFill>
+                  <a:srgbClr val="1A1D23"/>
+                </a:solidFill>
+              </a:defRPr>
             </a:pPr>
             <a:r>
               <a:rPr sz="1600" b="1">
@@ -27706,6 +28666,11 @@
               <a:spcAft>
                 <a:spcPts val="600"/>
               </a:spcAft>
+              <a:defRPr>
+                <a:solidFill>
+                  <a:srgbClr val="1A1D23"/>
+                </a:solidFill>
+              </a:defRPr>
             </a:pPr>
             <a:r>
               <a:rPr sz="1600" b="1">
@@ -27740,6 +28705,11 @@
               <a:spcAft>
                 <a:spcPts val="600"/>
               </a:spcAft>
+              <a:defRPr>
+                <a:solidFill>
+                  <a:srgbClr val="1A1D23"/>
+                </a:solidFill>
+              </a:defRPr>
             </a:pPr>
             <a:r>
               <a:rPr sz="1600" b="1">
@@ -27774,6 +28744,11 @@
               <a:spcAft>
                 <a:spcPts val="600"/>
               </a:spcAft>
+              <a:defRPr>
+                <a:solidFill>
+                  <a:srgbClr val="1A1D23"/>
+                </a:solidFill>
+              </a:defRPr>
             </a:pPr>
             <a:r>
               <a:rPr sz="1600" b="1">
@@ -27808,6 +28783,11 @@
               <a:spcAft>
                 <a:spcPts val="600"/>
               </a:spcAft>
+              <a:defRPr>
+                <a:solidFill>
+                  <a:srgbClr val="1A1D23"/>
+                </a:solidFill>
+              </a:defRPr>
             </a:pPr>
             <a:r>
               <a:rPr sz="1600" b="1">
@@ -28035,7 +29015,13 @@
           </a:bodyPr>
           <a:lstStyle/>
           <a:p>
-            <a:pPr algn="l"/>
+            <a:pPr algn="l">
+              <a:defRPr>
+                <a:solidFill>
+                  <a:srgbClr val="1A1D23"/>
+                </a:solidFill>
+              </a:defRPr>
+            </a:pPr>
             <a:r>
               <a:rPr sz="3600" b="1">
                 <a:solidFill>
@@ -28074,6 +29060,11 @@
               <a:spcAft>
                 <a:spcPts val="600"/>
               </a:spcAft>
+              <a:defRPr>
+                <a:solidFill>
+                  <a:srgbClr val="1A1D23"/>
+                </a:solidFill>
+              </a:defRPr>
             </a:pPr>
             <a:r>
               <a:rPr sz="1600" b="1">
@@ -28108,6 +29099,11 @@
               <a:spcAft>
                 <a:spcPts val="600"/>
               </a:spcAft>
+              <a:defRPr>
+                <a:solidFill>
+                  <a:srgbClr val="1A1D23"/>
+                </a:solidFill>
+              </a:defRPr>
             </a:pPr>
             <a:r>
               <a:rPr sz="1600" b="1">
@@ -28142,6 +29138,11 @@
               <a:spcAft>
                 <a:spcPts val="600"/>
               </a:spcAft>
+              <a:defRPr>
+                <a:solidFill>
+                  <a:srgbClr val="1A1D23"/>
+                </a:solidFill>
+              </a:defRPr>
             </a:pPr>
             <a:r>
               <a:rPr sz="1600" b="1">
@@ -28176,6 +29177,11 @@
               <a:spcAft>
                 <a:spcPts val="600"/>
               </a:spcAft>
+              <a:defRPr>
+                <a:solidFill>
+                  <a:srgbClr val="1A1D23"/>
+                </a:solidFill>
+              </a:defRPr>
             </a:pPr>
             <a:r>
               <a:rPr sz="1600" b="1">
@@ -28210,6 +29216,11 @@
               <a:spcAft>
                 <a:spcPts val="600"/>
               </a:spcAft>
+              <a:defRPr>
+                <a:solidFill>
+                  <a:srgbClr val="1A1D23"/>
+                </a:solidFill>
+              </a:defRPr>
             </a:pPr>
             <a:r>
               <a:rPr sz="1600" b="1">
@@ -28437,7 +29448,13 @@
           </a:bodyPr>
           <a:lstStyle/>
           <a:p>
-            <a:pPr algn="l"/>
+            <a:pPr algn="l">
+              <a:defRPr>
+                <a:solidFill>
+                  <a:srgbClr val="1A1D23"/>
+                </a:solidFill>
+              </a:defRPr>
+            </a:pPr>
             <a:r>
               <a:rPr sz="3600" b="1">
                 <a:solidFill>
@@ -28556,7 +29573,13 @@
           </a:bodyPr>
           <a:lstStyle/>
           <a:p>
-            <a:pPr algn="l"/>
+            <a:pPr algn="l">
+              <a:defRPr>
+                <a:solidFill>
+                  <a:srgbClr val="64748B"/>
+                </a:solidFill>
+              </a:defRPr>
+            </a:pPr>
             <a:r>
               <a:rPr sz="1200" b="0" i="1">
                 <a:solidFill>
@@ -28765,7 +29788,13 @@
           </a:bodyPr>
           <a:lstStyle/>
           <a:p>
-            <a:pPr algn="l"/>
+            <a:pPr algn="l">
+              <a:defRPr>
+                <a:solidFill>
+                  <a:srgbClr val="00D4A8"/>
+                </a:solidFill>
+              </a:defRPr>
+            </a:pPr>
             <a:r>
               <a:rPr sz="1800" b="1" i="0">
                 <a:solidFill>
@@ -28800,7 +29829,13 @@
           </a:bodyPr>
           <a:lstStyle/>
           <a:p>
-            <a:pPr algn="l"/>
+            <a:pPr algn="l">
+              <a:defRPr>
+                <a:solidFill>
+                  <a:srgbClr val="FFFFFF"/>
+                </a:solidFill>
+              </a:defRPr>
+            </a:pPr>
             <a:r>
               <a:rPr sz="4800" b="1">
                 <a:solidFill>
@@ -28835,7 +29870,13 @@
           </a:bodyPr>
           <a:lstStyle/>
           <a:p>
-            <a:pPr algn="l"/>
+            <a:pPr algn="l">
+              <a:defRPr>
+                <a:solidFill>
+                  <a:srgbClr val="C3EFE3"/>
+                </a:solidFill>
+              </a:defRPr>
+            </a:pPr>
             <a:r>
               <a:rPr sz="2000" i="0">
                 <a:solidFill>
@@ -29044,7 +30085,13 @@
           </a:bodyPr>
           <a:lstStyle/>
           <a:p>
-            <a:pPr algn="l"/>
+            <a:pPr algn="l">
+              <a:defRPr>
+                <a:solidFill>
+                  <a:srgbClr val="1A1D23"/>
+                </a:solidFill>
+              </a:defRPr>
+            </a:pPr>
             <a:r>
               <a:rPr sz="3600" b="1">
                 <a:solidFill>
@@ -29103,7 +30150,13 @@
           </a:bodyPr>
           <a:lstStyle/>
           <a:p>
-            <a:pPr algn="ctr"/>
+            <a:pPr algn="ctr">
+              <a:defRPr>
+                <a:solidFill>
+                  <a:srgbClr val="64748B"/>
+                </a:solidFill>
+              </a:defRPr>
+            </a:pPr>
             <a:r>
               <a:rPr sz="1000" b="0" i="1">
                 <a:solidFill>
@@ -29312,7 +30365,13 @@
           </a:bodyPr>
           <a:lstStyle/>
           <a:p>
-            <a:pPr algn="l"/>
+            <a:pPr algn="l">
+              <a:defRPr>
+                <a:solidFill>
+                  <a:srgbClr val="1A1D23"/>
+                </a:solidFill>
+              </a:defRPr>
+            </a:pPr>
             <a:r>
               <a:rPr sz="3600" b="1">
                 <a:solidFill>
@@ -29351,6 +30410,11 @@
               <a:spcAft>
                 <a:spcPts val="600"/>
               </a:spcAft>
+              <a:defRPr>
+                <a:solidFill>
+                  <a:srgbClr val="1A1D23"/>
+                </a:solidFill>
+              </a:defRPr>
             </a:pPr>
             <a:r>
               <a:rPr sz="1600" b="1">
@@ -29385,6 +30449,11 @@
               <a:spcAft>
                 <a:spcPts val="600"/>
               </a:spcAft>
+              <a:defRPr>
+                <a:solidFill>
+                  <a:srgbClr val="1A1D23"/>
+                </a:solidFill>
+              </a:defRPr>
             </a:pPr>
             <a:r>
               <a:rPr sz="1600" b="1">
@@ -29419,6 +30488,11 @@
               <a:spcAft>
                 <a:spcPts val="600"/>
               </a:spcAft>
+              <a:defRPr>
+                <a:solidFill>
+                  <a:srgbClr val="1A1D23"/>
+                </a:solidFill>
+              </a:defRPr>
             </a:pPr>
             <a:r>
               <a:rPr sz="1600" b="1">
@@ -29453,6 +30527,11 @@
               <a:spcAft>
                 <a:spcPts val="600"/>
               </a:spcAft>
+              <a:defRPr>
+                <a:solidFill>
+                  <a:srgbClr val="1A1D23"/>
+                </a:solidFill>
+              </a:defRPr>
             </a:pPr>
             <a:r>
               <a:rPr sz="1600" b="1">
@@ -29487,6 +30566,11 @@
               <a:spcAft>
                 <a:spcPts val="600"/>
               </a:spcAft>
+              <a:defRPr>
+                <a:solidFill>
+                  <a:srgbClr val="1A1D23"/>
+                </a:solidFill>
+              </a:defRPr>
             </a:pPr>
             <a:r>
               <a:rPr sz="1600" b="1">
@@ -29714,7 +30798,13 @@
           </a:bodyPr>
           <a:lstStyle/>
           <a:p>
-            <a:pPr algn="l"/>
+            <a:pPr algn="l">
+              <a:defRPr>
+                <a:solidFill>
+                  <a:srgbClr val="1A1D23"/>
+                </a:solidFill>
+              </a:defRPr>
+            </a:pPr>
             <a:r>
               <a:rPr sz="3600" b="1">
                 <a:solidFill>
@@ -29753,6 +30843,11 @@
               <a:spcAft>
                 <a:spcPts val="600"/>
               </a:spcAft>
+              <a:defRPr>
+                <a:solidFill>
+                  <a:srgbClr val="1A1D23"/>
+                </a:solidFill>
+              </a:defRPr>
             </a:pPr>
             <a:r>
               <a:rPr sz="1600" b="1">
@@ -29787,6 +30882,11 @@
               <a:spcAft>
                 <a:spcPts val="600"/>
               </a:spcAft>
+              <a:defRPr>
+                <a:solidFill>
+                  <a:srgbClr val="1A1D23"/>
+                </a:solidFill>
+              </a:defRPr>
             </a:pPr>
             <a:r>
               <a:rPr sz="1600" b="1">
@@ -29821,6 +30921,11 @@
               <a:spcAft>
                 <a:spcPts val="600"/>
               </a:spcAft>
+              <a:defRPr>
+                <a:solidFill>
+                  <a:srgbClr val="1A1D23"/>
+                </a:solidFill>
+              </a:defRPr>
             </a:pPr>
             <a:r>
               <a:rPr sz="1600" b="1">
@@ -29855,6 +30960,11 @@
               <a:spcAft>
                 <a:spcPts val="600"/>
               </a:spcAft>
+              <a:defRPr>
+                <a:solidFill>
+                  <a:srgbClr val="1A1D23"/>
+                </a:solidFill>
+              </a:defRPr>
             </a:pPr>
             <a:r>
               <a:rPr sz="1600" b="1">
@@ -29889,6 +30999,11 @@
               <a:spcAft>
                 <a:spcPts val="600"/>
               </a:spcAft>
+              <a:defRPr>
+                <a:solidFill>
+                  <a:srgbClr val="1A1D23"/>
+                </a:solidFill>
+              </a:defRPr>
             </a:pPr>
             <a:r>
               <a:rPr sz="1600" b="1">
@@ -30116,7 +31231,13 @@
           </a:bodyPr>
           <a:lstStyle/>
           <a:p>
-            <a:pPr algn="l"/>
+            <a:pPr algn="l">
+              <a:defRPr>
+                <a:solidFill>
+                  <a:srgbClr val="1A1D23"/>
+                </a:solidFill>
+              </a:defRPr>
+            </a:pPr>
             <a:r>
               <a:rPr sz="3600" b="1">
                 <a:solidFill>
@@ -30155,6 +31276,11 @@
               <a:spcAft>
                 <a:spcPts val="600"/>
               </a:spcAft>
+              <a:defRPr>
+                <a:solidFill>
+                  <a:srgbClr val="1A1D23"/>
+                </a:solidFill>
+              </a:defRPr>
             </a:pPr>
             <a:r>
               <a:rPr sz="1600" b="1">
@@ -30189,6 +31315,11 @@
               <a:spcAft>
                 <a:spcPts val="600"/>
               </a:spcAft>
+              <a:defRPr>
+                <a:solidFill>
+                  <a:srgbClr val="1A1D23"/>
+                </a:solidFill>
+              </a:defRPr>
             </a:pPr>
             <a:r>
               <a:rPr sz="1600" b="1">
@@ -30223,6 +31354,11 @@
               <a:spcAft>
                 <a:spcPts val="600"/>
               </a:spcAft>
+              <a:defRPr>
+                <a:solidFill>
+                  <a:srgbClr val="1A1D23"/>
+                </a:solidFill>
+              </a:defRPr>
             </a:pPr>
             <a:r>
               <a:rPr sz="1600" b="1">
@@ -30257,6 +31393,11 @@
               <a:spcAft>
                 <a:spcPts val="600"/>
               </a:spcAft>
+              <a:defRPr>
+                <a:solidFill>
+                  <a:srgbClr val="1A1D23"/>
+                </a:solidFill>
+              </a:defRPr>
             </a:pPr>
             <a:r>
               <a:rPr sz="1600" b="1">
@@ -30291,6 +31432,11 @@
               <a:spcAft>
                 <a:spcPts val="600"/>
               </a:spcAft>
+              <a:defRPr>
+                <a:solidFill>
+                  <a:srgbClr val="1A1D23"/>
+                </a:solidFill>
+              </a:defRPr>
             </a:pPr>
             <a:r>
               <a:rPr sz="1600" b="1">
@@ -30518,7 +31664,13 @@
           </a:bodyPr>
           <a:lstStyle/>
           <a:p>
-            <a:pPr algn="l"/>
+            <a:pPr algn="l">
+              <a:defRPr>
+                <a:solidFill>
+                  <a:srgbClr val="1A1D23"/>
+                </a:solidFill>
+              </a:defRPr>
+            </a:pPr>
             <a:r>
               <a:rPr sz="3600" b="1">
                 <a:solidFill>
@@ -30557,6 +31709,11 @@
               <a:spcAft>
                 <a:spcPts val="600"/>
               </a:spcAft>
+              <a:defRPr>
+                <a:solidFill>
+                  <a:srgbClr val="1A1D23"/>
+                </a:solidFill>
+              </a:defRPr>
             </a:pPr>
             <a:r>
               <a:rPr sz="1600" b="1">
@@ -30591,6 +31748,11 @@
               <a:spcAft>
                 <a:spcPts val="600"/>
               </a:spcAft>
+              <a:defRPr>
+                <a:solidFill>
+                  <a:srgbClr val="1A1D23"/>
+                </a:solidFill>
+              </a:defRPr>
             </a:pPr>
             <a:r>
               <a:rPr sz="1600" b="1">
@@ -30625,6 +31787,11 @@
               <a:spcAft>
                 <a:spcPts val="600"/>
               </a:spcAft>
+              <a:defRPr>
+                <a:solidFill>
+                  <a:srgbClr val="1A1D23"/>
+                </a:solidFill>
+              </a:defRPr>
             </a:pPr>
             <a:r>
               <a:rPr sz="1600" b="1">
@@ -30659,6 +31826,11 @@
               <a:spcAft>
                 <a:spcPts val="600"/>
               </a:spcAft>
+              <a:defRPr>
+                <a:solidFill>
+                  <a:srgbClr val="1A1D23"/>
+                </a:solidFill>
+              </a:defRPr>
             </a:pPr>
             <a:r>
               <a:rPr sz="1600" b="1">
@@ -30693,6 +31865,11 @@
               <a:spcAft>
                 <a:spcPts val="600"/>
               </a:spcAft>
+              <a:defRPr>
+                <a:solidFill>
+                  <a:srgbClr val="1A1D23"/>
+                </a:solidFill>
+              </a:defRPr>
             </a:pPr>
             <a:r>
               <a:rPr sz="1600" b="1">
@@ -30920,7 +32097,13 @@
           </a:bodyPr>
           <a:lstStyle/>
           <a:p>
-            <a:pPr algn="l"/>
+            <a:pPr algn="l">
+              <a:defRPr>
+                <a:solidFill>
+                  <a:srgbClr val="1A1D23"/>
+                </a:solidFill>
+              </a:defRPr>
+            </a:pPr>
             <a:r>
               <a:rPr sz="3600" b="1">
                 <a:solidFill>
@@ -30959,6 +32142,11 @@
               <a:spcAft>
                 <a:spcPts val="600"/>
               </a:spcAft>
+              <a:defRPr>
+                <a:solidFill>
+                  <a:srgbClr val="1A1D23"/>
+                </a:solidFill>
+              </a:defRPr>
             </a:pPr>
             <a:r>
               <a:rPr sz="1600" b="1">
@@ -30993,6 +32181,11 @@
               <a:spcAft>
                 <a:spcPts val="600"/>
               </a:spcAft>
+              <a:defRPr>
+                <a:solidFill>
+                  <a:srgbClr val="1A1D23"/>
+                </a:solidFill>
+              </a:defRPr>
             </a:pPr>
             <a:r>
               <a:rPr sz="1600" b="1">
@@ -31027,6 +32220,11 @@
               <a:spcAft>
                 <a:spcPts val="600"/>
               </a:spcAft>
+              <a:defRPr>
+                <a:solidFill>
+                  <a:srgbClr val="1A1D23"/>
+                </a:solidFill>
+              </a:defRPr>
             </a:pPr>
             <a:r>
               <a:rPr sz="1600" b="1">
@@ -31061,6 +32259,11 @@
               <a:spcAft>
                 <a:spcPts val="600"/>
               </a:spcAft>
+              <a:defRPr>
+                <a:solidFill>
+                  <a:srgbClr val="1A1D23"/>
+                </a:solidFill>
+              </a:defRPr>
             </a:pPr>
             <a:r>
               <a:rPr sz="1600" b="1">
@@ -31095,6 +32298,11 @@
               <a:spcAft>
                 <a:spcPts val="600"/>
               </a:spcAft>
+              <a:defRPr>
+                <a:solidFill>
+                  <a:srgbClr val="1A1D23"/>
+                </a:solidFill>
+              </a:defRPr>
             </a:pPr>
             <a:r>
               <a:rPr sz="1600" b="1">
@@ -31322,7 +32530,13 @@
           </a:bodyPr>
           <a:lstStyle/>
           <a:p>
-            <a:pPr algn="l"/>
+            <a:pPr algn="l">
+              <a:defRPr>
+                <a:solidFill>
+                  <a:srgbClr val="1A1D23"/>
+                </a:solidFill>
+              </a:defRPr>
+            </a:pPr>
             <a:r>
               <a:rPr sz="3600" b="1">
                 <a:solidFill>
@@ -31357,7 +32571,13 @@
           </a:bodyPr>
           <a:lstStyle/>
           <a:p>
-            <a:pPr algn="l"/>
+            <a:pPr algn="l">
+              <a:defRPr>
+                <a:solidFill>
+                  <a:srgbClr val="64748B"/>
+                </a:solidFill>
+              </a:defRPr>
+            </a:pPr>
             <a:r>
               <a:rPr sz="1800" i="1">
                 <a:solidFill>
@@ -31396,6 +32616,11 @@
               <a:spcAft>
                 <a:spcPts val="600"/>
               </a:spcAft>
+              <a:defRPr>
+                <a:solidFill>
+                  <a:srgbClr val="1A1D23"/>
+                </a:solidFill>
+              </a:defRPr>
             </a:pPr>
             <a:r>
               <a:rPr sz="1600" b="1">
@@ -31430,6 +32655,11 @@
               <a:spcAft>
                 <a:spcPts val="600"/>
               </a:spcAft>
+              <a:defRPr>
+                <a:solidFill>
+                  <a:srgbClr val="1A1D23"/>
+                </a:solidFill>
+              </a:defRPr>
             </a:pPr>
             <a:r>
               <a:rPr sz="1600" b="1">
@@ -31464,6 +32694,11 @@
               <a:spcAft>
                 <a:spcPts val="600"/>
               </a:spcAft>
+              <a:defRPr>
+                <a:solidFill>
+                  <a:srgbClr val="1A1D23"/>
+                </a:solidFill>
+              </a:defRPr>
             </a:pPr>
             <a:r>
               <a:rPr sz="1600" b="1">
@@ -31498,6 +32733,11 @@
               <a:spcAft>
                 <a:spcPts val="600"/>
               </a:spcAft>
+              <a:defRPr>
+                <a:solidFill>
+                  <a:srgbClr val="1A1D23"/>
+                </a:solidFill>
+              </a:defRPr>
             </a:pPr>
             <a:r>
               <a:rPr sz="1600" b="1">
@@ -31532,6 +32772,11 @@
               <a:spcAft>
                 <a:spcPts val="600"/>
               </a:spcAft>
+              <a:defRPr>
+                <a:solidFill>
+                  <a:srgbClr val="1A1D23"/>
+                </a:solidFill>
+              </a:defRPr>
             </a:pPr>
             <a:r>
               <a:rPr sz="1600" b="1">
@@ -31759,7 +33004,13 @@
           </a:bodyPr>
           <a:lstStyle/>
           <a:p>
-            <a:pPr algn="l"/>
+            <a:pPr algn="l">
+              <a:defRPr>
+                <a:solidFill>
+                  <a:srgbClr val="1A1D23"/>
+                </a:solidFill>
+              </a:defRPr>
+            </a:pPr>
             <a:r>
               <a:rPr sz="3600" b="1">
                 <a:solidFill>
@@ -31878,7 +33129,13 @@
           </a:bodyPr>
           <a:lstStyle/>
           <a:p>
-            <a:pPr algn="l"/>
+            <a:pPr algn="l">
+              <a:defRPr>
+                <a:solidFill>
+                  <a:srgbClr val="64748B"/>
+                </a:solidFill>
+              </a:defRPr>
+            </a:pPr>
             <a:r>
               <a:rPr sz="1200" b="0" i="1">
                 <a:solidFill>
@@ -32087,7 +33344,13 @@
           </a:bodyPr>
           <a:lstStyle/>
           <a:p>
-            <a:pPr algn="l"/>
+            <a:pPr algn="l">
+              <a:defRPr>
+                <a:solidFill>
+                  <a:srgbClr val="00D4A8"/>
+                </a:solidFill>
+              </a:defRPr>
+            </a:pPr>
             <a:r>
               <a:rPr sz="1800" b="1" i="0">
                 <a:solidFill>
@@ -32122,7 +33385,13 @@
           </a:bodyPr>
           <a:lstStyle/>
           <a:p>
-            <a:pPr algn="l"/>
+            <a:pPr algn="l">
+              <a:defRPr>
+                <a:solidFill>
+                  <a:srgbClr val="FFFFFF"/>
+                </a:solidFill>
+              </a:defRPr>
+            </a:pPr>
             <a:r>
               <a:rPr sz="4800" b="1">
                 <a:solidFill>
@@ -32157,7 +33426,13 @@
           </a:bodyPr>
           <a:lstStyle/>
           <a:p>
-            <a:pPr algn="l"/>
+            <a:pPr algn="l">
+              <a:defRPr>
+                <a:solidFill>
+                  <a:srgbClr val="C3EFE3"/>
+                </a:solidFill>
+              </a:defRPr>
+            </a:pPr>
             <a:r>
               <a:rPr sz="2000" i="0">
                 <a:solidFill>
@@ -32366,7 +33641,13 @@
           </a:bodyPr>
           <a:lstStyle/>
           <a:p>
-            <a:pPr algn="l"/>
+            <a:pPr algn="l">
+              <a:defRPr>
+                <a:solidFill>
+                  <a:srgbClr val="1A1D23"/>
+                </a:solidFill>
+              </a:defRPr>
+            </a:pPr>
             <a:r>
               <a:rPr sz="3600" b="1">
                 <a:solidFill>
@@ -33078,7 +34359,13 @@
           </a:bodyPr>
           <a:lstStyle/>
           <a:p>
-            <a:pPr algn="l"/>
+            <a:pPr algn="l">
+              <a:defRPr>
+                <a:solidFill>
+                  <a:srgbClr val="1A1D23"/>
+                </a:solidFill>
+              </a:defRPr>
+            </a:pPr>
             <a:r>
               <a:rPr sz="3600" b="1">
                 <a:solidFill>
@@ -33113,7 +34400,13 @@
           </a:bodyPr>
           <a:lstStyle/>
           <a:p>
-            <a:pPr algn="l"/>
+            <a:pPr algn="l">
+              <a:defRPr>
+                <a:solidFill>
+                  <a:srgbClr val="64748B"/>
+                </a:solidFill>
+              </a:defRPr>
+            </a:pPr>
             <a:r>
               <a:rPr sz="1800" i="1">
                 <a:solidFill>
@@ -33474,7 +34767,13 @@
           </a:bodyPr>
           <a:lstStyle/>
           <a:p>
-            <a:pPr algn="ctr"/>
+            <a:pPr algn="ctr">
+              <a:defRPr>
+                <a:solidFill>
+                  <a:srgbClr val="64748B"/>
+                </a:solidFill>
+              </a:defRPr>
+            </a:pPr>
             <a:r>
               <a:rPr sz="1000" b="0" i="1">
                 <a:solidFill>
@@ -33683,7 +34982,13 @@
           </a:bodyPr>
           <a:lstStyle/>
           <a:p>
-            <a:pPr algn="l"/>
+            <a:pPr algn="l">
+              <a:defRPr>
+                <a:solidFill>
+                  <a:srgbClr val="1A1D23"/>
+                </a:solidFill>
+              </a:defRPr>
+            </a:pPr>
             <a:r>
               <a:rPr sz="3600" b="1">
                 <a:solidFill>
@@ -33718,7 +35023,13 @@
           </a:bodyPr>
           <a:lstStyle/>
           <a:p>
-            <a:pPr algn="l"/>
+            <a:pPr algn="l">
+              <a:defRPr>
+                <a:solidFill>
+                  <a:srgbClr val="64748B"/>
+                </a:solidFill>
+              </a:defRPr>
+            </a:pPr>
             <a:r>
               <a:rPr sz="1800" i="1">
                 <a:solidFill>
@@ -33999,7 +35310,13 @@
           </a:bodyPr>
           <a:lstStyle/>
           <a:p>
-            <a:pPr algn="ctr"/>
+            <a:pPr algn="ctr">
+              <a:defRPr>
+                <a:solidFill>
+                  <a:srgbClr val="64748B"/>
+                </a:solidFill>
+              </a:defRPr>
+            </a:pPr>
             <a:r>
               <a:rPr sz="1000" b="0" i="1">
                 <a:solidFill>
@@ -34208,7 +35525,13 @@
           </a:bodyPr>
           <a:lstStyle/>
           <a:p>
-            <a:pPr algn="l"/>
+            <a:pPr algn="l">
+              <a:defRPr>
+                <a:solidFill>
+                  <a:srgbClr val="1A1D23"/>
+                </a:solidFill>
+              </a:defRPr>
+            </a:pPr>
             <a:r>
               <a:rPr sz="3600" b="1">
                 <a:solidFill>
@@ -34243,7 +35566,13 @@
           </a:bodyPr>
           <a:lstStyle/>
           <a:p>
-            <a:pPr algn="l"/>
+            <a:pPr algn="l">
+              <a:defRPr>
+                <a:solidFill>
+                  <a:srgbClr val="64748B"/>
+                </a:solidFill>
+              </a:defRPr>
+            </a:pPr>
             <a:r>
               <a:rPr sz="1800" i="1">
                 <a:solidFill>
@@ -34794,7 +36123,13 @@
           </a:bodyPr>
           <a:lstStyle/>
           <a:p>
-            <a:pPr algn="l"/>
+            <a:pPr algn="l">
+              <a:defRPr>
+                <a:solidFill>
+                  <a:srgbClr val="1A1D23"/>
+                </a:solidFill>
+              </a:defRPr>
+            </a:pPr>
             <a:r>
               <a:rPr sz="3600" b="1">
                 <a:solidFill>
@@ -34833,6 +36168,11 @@
               <a:spcAft>
                 <a:spcPts val="600"/>
               </a:spcAft>
+              <a:defRPr>
+                <a:solidFill>
+                  <a:srgbClr val="1A1D23"/>
+                </a:solidFill>
+              </a:defRPr>
             </a:pPr>
             <a:r>
               <a:rPr sz="1600" b="1">
@@ -34867,6 +36207,11 @@
               <a:spcAft>
                 <a:spcPts val="600"/>
               </a:spcAft>
+              <a:defRPr>
+                <a:solidFill>
+                  <a:srgbClr val="1A1D23"/>
+                </a:solidFill>
+              </a:defRPr>
             </a:pPr>
             <a:r>
               <a:rPr sz="1600" b="1">
@@ -34901,6 +36246,11 @@
               <a:spcAft>
                 <a:spcPts val="600"/>
               </a:spcAft>
+              <a:defRPr>
+                <a:solidFill>
+                  <a:srgbClr val="1A1D23"/>
+                </a:solidFill>
+              </a:defRPr>
             </a:pPr>
             <a:r>
               <a:rPr sz="1600" b="1">
@@ -34935,6 +36285,11 @@
               <a:spcAft>
                 <a:spcPts val="600"/>
               </a:spcAft>
+              <a:defRPr>
+                <a:solidFill>
+                  <a:srgbClr val="1A1D23"/>
+                </a:solidFill>
+              </a:defRPr>
             </a:pPr>
             <a:r>
               <a:rPr sz="1600" b="1">
@@ -34969,6 +36324,11 @@
               <a:spcAft>
                 <a:spcPts val="600"/>
               </a:spcAft>
+              <a:defRPr>
+                <a:solidFill>
+                  <a:srgbClr val="1A1D23"/>
+                </a:solidFill>
+              </a:defRPr>
             </a:pPr>
             <a:r>
               <a:rPr sz="1600" b="1">
@@ -35003,6 +36363,11 @@
               <a:spcAft>
                 <a:spcPts val="600"/>
               </a:spcAft>
+              <a:defRPr>
+                <a:solidFill>
+                  <a:srgbClr val="1A1D23"/>
+                </a:solidFill>
+              </a:defRPr>
             </a:pPr>
             <a:r>
               <a:rPr sz="1600" b="1">
@@ -35230,7 +36595,13 @@
           </a:bodyPr>
           <a:lstStyle/>
           <a:p>
-            <a:pPr algn="l"/>
+            <a:pPr algn="l">
+              <a:defRPr>
+                <a:solidFill>
+                  <a:srgbClr val="1A1D23"/>
+                </a:solidFill>
+              </a:defRPr>
+            </a:pPr>
             <a:r>
               <a:rPr sz="3600" b="1">
                 <a:solidFill>
@@ -35265,7 +36636,13 @@
           </a:bodyPr>
           <a:lstStyle/>
           <a:p>
-            <a:pPr algn="l"/>
+            <a:pPr algn="l">
+              <a:defRPr>
+                <a:solidFill>
+                  <a:srgbClr val="64748B"/>
+                </a:solidFill>
+              </a:defRPr>
+            </a:pPr>
             <a:r>
               <a:rPr sz="1800" i="1">
                 <a:solidFill>
@@ -35304,6 +36681,11 @@
               <a:spcAft>
                 <a:spcPts val="600"/>
               </a:spcAft>
+              <a:defRPr>
+                <a:solidFill>
+                  <a:srgbClr val="1A1D23"/>
+                </a:solidFill>
+              </a:defRPr>
             </a:pPr>
             <a:r>
               <a:rPr sz="1600" b="1">
@@ -35338,6 +36720,11 @@
               <a:spcAft>
                 <a:spcPts val="600"/>
               </a:spcAft>
+              <a:defRPr>
+                <a:solidFill>
+                  <a:srgbClr val="1A1D23"/>
+                </a:solidFill>
+              </a:defRPr>
             </a:pPr>
             <a:r>
               <a:rPr sz="1600" b="1">
@@ -35372,6 +36759,11 @@
               <a:spcAft>
                 <a:spcPts val="600"/>
               </a:spcAft>
+              <a:defRPr>
+                <a:solidFill>
+                  <a:srgbClr val="1A1D23"/>
+                </a:solidFill>
+              </a:defRPr>
             </a:pPr>
             <a:r>
               <a:rPr sz="1600" b="1">
@@ -35406,6 +36798,11 @@
               <a:spcAft>
                 <a:spcPts val="600"/>
               </a:spcAft>
+              <a:defRPr>
+                <a:solidFill>
+                  <a:srgbClr val="1A1D23"/>
+                </a:solidFill>
+              </a:defRPr>
             </a:pPr>
             <a:r>
               <a:rPr sz="1600" b="1">
@@ -35440,6 +36837,11 @@
               <a:spcAft>
                 <a:spcPts val="600"/>
               </a:spcAft>
+              <a:defRPr>
+                <a:solidFill>
+                  <a:srgbClr val="1A1D23"/>
+                </a:solidFill>
+              </a:defRPr>
             </a:pPr>
             <a:r>
               <a:rPr sz="1600" b="1">
@@ -35474,6 +36876,11 @@
               <a:spcAft>
                 <a:spcPts val="600"/>
               </a:spcAft>
+              <a:defRPr>
+                <a:solidFill>
+                  <a:srgbClr val="1A1D23"/>
+                </a:solidFill>
+              </a:defRPr>
             </a:pPr>
             <a:r>
               <a:rPr sz="1600" b="1">
@@ -35701,7 +37108,13 @@
           </a:bodyPr>
           <a:lstStyle/>
           <a:p>
-            <a:pPr algn="l"/>
+            <a:pPr algn="l">
+              <a:defRPr>
+                <a:solidFill>
+                  <a:srgbClr val="1A1D23"/>
+                </a:solidFill>
+              </a:defRPr>
+            </a:pPr>
             <a:r>
               <a:rPr sz="3600" b="1">
                 <a:solidFill>
@@ -35740,6 +37153,11 @@
               <a:spcAft>
                 <a:spcPts val="600"/>
               </a:spcAft>
+              <a:defRPr>
+                <a:solidFill>
+                  <a:srgbClr val="1A1D23"/>
+                </a:solidFill>
+              </a:defRPr>
             </a:pPr>
             <a:r>
               <a:rPr sz="1600" b="1">
@@ -35774,6 +37192,11 @@
               <a:spcAft>
                 <a:spcPts val="600"/>
               </a:spcAft>
+              <a:defRPr>
+                <a:solidFill>
+                  <a:srgbClr val="1A1D23"/>
+                </a:solidFill>
+              </a:defRPr>
             </a:pPr>
             <a:r>
               <a:rPr sz="1600" b="1">
@@ -35808,6 +37231,11 @@
               <a:spcAft>
                 <a:spcPts val="600"/>
               </a:spcAft>
+              <a:defRPr>
+                <a:solidFill>
+                  <a:srgbClr val="1A1D23"/>
+                </a:solidFill>
+              </a:defRPr>
             </a:pPr>
             <a:r>
               <a:rPr sz="1600" b="1">
@@ -35842,6 +37270,11 @@
               <a:spcAft>
                 <a:spcPts val="600"/>
               </a:spcAft>
+              <a:defRPr>
+                <a:solidFill>
+                  <a:srgbClr val="1A1D23"/>
+                </a:solidFill>
+              </a:defRPr>
             </a:pPr>
             <a:r>
               <a:rPr sz="1600" b="1">
@@ -35876,6 +37309,11 @@
               <a:spcAft>
                 <a:spcPts val="600"/>
               </a:spcAft>
+              <a:defRPr>
+                <a:solidFill>
+                  <a:srgbClr val="1A1D23"/>
+                </a:solidFill>
+              </a:defRPr>
             </a:pPr>
             <a:r>
               <a:rPr sz="1600" b="1">
@@ -36103,7 +37541,13 @@
           </a:bodyPr>
           <a:lstStyle/>
           <a:p>
-            <a:pPr algn="l"/>
+            <a:pPr algn="l">
+              <a:defRPr>
+                <a:solidFill>
+                  <a:srgbClr val="1A1D23"/>
+                </a:solidFill>
+              </a:defRPr>
+            </a:pPr>
             <a:r>
               <a:rPr sz="3600" b="1">
                 <a:solidFill>
@@ -36162,7 +37606,13 @@
           </a:bodyPr>
           <a:lstStyle/>
           <a:p>
-            <a:pPr algn="ctr"/>
+            <a:pPr algn="ctr">
+              <a:defRPr>
+                <a:solidFill>
+                  <a:srgbClr val="64748B"/>
+                </a:solidFill>
+              </a:defRPr>
+            </a:pPr>
             <a:r>
               <a:rPr sz="1000" b="0" i="1">
                 <a:solidFill>
@@ -36371,7 +37821,13 @@
           </a:bodyPr>
           <a:lstStyle/>
           <a:p>
-            <a:pPr algn="l"/>
+            <a:pPr algn="l">
+              <a:defRPr>
+                <a:solidFill>
+                  <a:srgbClr val="00D4A8"/>
+                </a:solidFill>
+              </a:defRPr>
+            </a:pPr>
             <a:r>
               <a:rPr sz="1800" b="1" i="0">
                 <a:solidFill>
@@ -36406,7 +37862,13 @@
           </a:bodyPr>
           <a:lstStyle/>
           <a:p>
-            <a:pPr algn="l"/>
+            <a:pPr algn="l">
+              <a:defRPr>
+                <a:solidFill>
+                  <a:srgbClr val="FFFFFF"/>
+                </a:solidFill>
+              </a:defRPr>
+            </a:pPr>
             <a:r>
               <a:rPr sz="4800" b="1">
                 <a:solidFill>
@@ -36441,7 +37903,13 @@
           </a:bodyPr>
           <a:lstStyle/>
           <a:p>
-            <a:pPr algn="l"/>
+            <a:pPr algn="l">
+              <a:defRPr>
+                <a:solidFill>
+                  <a:srgbClr val="C3EFE3"/>
+                </a:solidFill>
+              </a:defRPr>
+            </a:pPr>
             <a:r>
               <a:rPr sz="2000" i="0">
                 <a:solidFill>
@@ -36650,7 +38118,13 @@
           </a:bodyPr>
           <a:lstStyle/>
           <a:p>
-            <a:pPr algn="l"/>
+            <a:pPr algn="l">
+              <a:defRPr>
+                <a:solidFill>
+                  <a:srgbClr val="1A1D23"/>
+                </a:solidFill>
+              </a:defRPr>
+            </a:pPr>
             <a:r>
               <a:rPr sz="3600" b="1">
                 <a:solidFill>
@@ -36685,7 +38159,13 @@
           </a:bodyPr>
           <a:lstStyle/>
           <a:p>
-            <a:pPr algn="l"/>
+            <a:pPr algn="l">
+              <a:defRPr>
+                <a:solidFill>
+                  <a:srgbClr val="64748B"/>
+                </a:solidFill>
+              </a:defRPr>
+            </a:pPr>
             <a:r>
               <a:rPr sz="1800" i="1">
                 <a:solidFill>
@@ -36724,6 +38204,11 @@
               <a:spcAft>
                 <a:spcPts val="600"/>
               </a:spcAft>
+              <a:defRPr>
+                <a:solidFill>
+                  <a:srgbClr val="1A1D23"/>
+                </a:solidFill>
+              </a:defRPr>
             </a:pPr>
             <a:r>
               <a:rPr sz="1600" b="1">
@@ -36758,6 +38243,11 @@
               <a:spcAft>
                 <a:spcPts val="600"/>
               </a:spcAft>
+              <a:defRPr>
+                <a:solidFill>
+                  <a:srgbClr val="1A1D23"/>
+                </a:solidFill>
+              </a:defRPr>
             </a:pPr>
             <a:r>
               <a:rPr sz="1600" b="1">
@@ -36792,6 +38282,11 @@
               <a:spcAft>
                 <a:spcPts val="600"/>
               </a:spcAft>
+              <a:defRPr>
+                <a:solidFill>
+                  <a:srgbClr val="1A1D23"/>
+                </a:solidFill>
+              </a:defRPr>
             </a:pPr>
             <a:r>
               <a:rPr sz="1600" b="1">
@@ -36826,6 +38321,11 @@
               <a:spcAft>
                 <a:spcPts val="600"/>
               </a:spcAft>
+              <a:defRPr>
+                <a:solidFill>
+                  <a:srgbClr val="1A1D23"/>
+                </a:solidFill>
+              </a:defRPr>
             </a:pPr>
             <a:r>
               <a:rPr sz="1600" b="1">
@@ -36860,6 +38360,11 @@
               <a:spcAft>
                 <a:spcPts val="600"/>
               </a:spcAft>
+              <a:defRPr>
+                <a:solidFill>
+                  <a:srgbClr val="1A1D23"/>
+                </a:solidFill>
+              </a:defRPr>
             </a:pPr>
             <a:r>
               <a:rPr sz="1600" b="1">
@@ -37087,7 +38592,13 @@
           </a:bodyPr>
           <a:lstStyle/>
           <a:p>
-            <a:pPr algn="l"/>
+            <a:pPr algn="l">
+              <a:defRPr>
+                <a:solidFill>
+                  <a:srgbClr val="1A1D23"/>
+                </a:solidFill>
+              </a:defRPr>
+            </a:pPr>
             <a:r>
               <a:rPr sz="3600" b="1">
                 <a:solidFill>
@@ -37126,6 +38637,11 @@
               <a:spcAft>
                 <a:spcPts val="600"/>
               </a:spcAft>
+              <a:defRPr>
+                <a:solidFill>
+                  <a:srgbClr val="1A1D23"/>
+                </a:solidFill>
+              </a:defRPr>
             </a:pPr>
             <a:r>
               <a:rPr sz="1600" b="1">
@@ -37160,6 +38676,11 @@
               <a:spcAft>
                 <a:spcPts val="600"/>
               </a:spcAft>
+              <a:defRPr>
+                <a:solidFill>
+                  <a:srgbClr val="1A1D23"/>
+                </a:solidFill>
+              </a:defRPr>
             </a:pPr>
             <a:r>
               <a:rPr sz="1600" b="1">
@@ -37194,6 +38715,11 @@
               <a:spcAft>
                 <a:spcPts val="600"/>
               </a:spcAft>
+              <a:defRPr>
+                <a:solidFill>
+                  <a:srgbClr val="1A1D23"/>
+                </a:solidFill>
+              </a:defRPr>
             </a:pPr>
             <a:r>
               <a:rPr sz="1600" b="1">
@@ -37228,6 +38754,11 @@
               <a:spcAft>
                 <a:spcPts val="600"/>
               </a:spcAft>
+              <a:defRPr>
+                <a:solidFill>
+                  <a:srgbClr val="1A1D23"/>
+                </a:solidFill>
+              </a:defRPr>
             </a:pPr>
             <a:r>
               <a:rPr sz="1600" b="1">
@@ -37262,6 +38793,11 @@
               <a:spcAft>
                 <a:spcPts val="600"/>
               </a:spcAft>
+              <a:defRPr>
+                <a:solidFill>
+                  <a:srgbClr val="1A1D23"/>
+                </a:solidFill>
+              </a:defRPr>
             </a:pPr>
             <a:r>
               <a:rPr sz="1600" b="1">
@@ -37489,7 +39025,13 @@
           </a:bodyPr>
           <a:lstStyle/>
           <a:p>
-            <a:pPr algn="l"/>
+            <a:pPr algn="l">
+              <a:defRPr>
+                <a:solidFill>
+                  <a:srgbClr val="1A1D23"/>
+                </a:solidFill>
+              </a:defRPr>
+            </a:pPr>
             <a:r>
               <a:rPr sz="3600" b="1">
                 <a:solidFill>
@@ -37524,7 +39066,13 @@
           </a:bodyPr>
           <a:lstStyle/>
           <a:p>
-            <a:pPr algn="l"/>
+            <a:pPr algn="l">
+              <a:defRPr>
+                <a:solidFill>
+                  <a:srgbClr val="64748B"/>
+                </a:solidFill>
+              </a:defRPr>
+            </a:pPr>
             <a:r>
               <a:rPr sz="1800" i="1">
                 <a:solidFill>
@@ -38235,7 +39783,13 @@
           </a:bodyPr>
           <a:lstStyle/>
           <a:p>
-            <a:pPr algn="l"/>
+            <a:pPr algn="l">
+              <a:defRPr>
+                <a:solidFill>
+                  <a:srgbClr val="1A1D23"/>
+                </a:solidFill>
+              </a:defRPr>
+            </a:pPr>
             <a:r>
               <a:rPr sz="3600" b="1">
                 <a:solidFill>
@@ -38360,7 +39914,13 @@
           </a:bodyPr>
           <a:lstStyle/>
           <a:p>
-            <a:pPr algn="ctr"/>
+            <a:pPr algn="ctr">
+              <a:defRPr>
+                <a:solidFill>
+                  <a:srgbClr val="FFFFFF"/>
+                </a:solidFill>
+              </a:defRPr>
+            </a:pPr>
             <a:r>
               <a:rPr sz="1500" b="1" i="0">
                 <a:solidFill>
@@ -38628,7 +40188,13 @@
           </a:bodyPr>
           <a:lstStyle/>
           <a:p>
-            <a:pPr algn="ctr"/>
+            <a:pPr algn="ctr">
+              <a:defRPr>
+                <a:solidFill>
+                  <a:srgbClr val="FFFFFF"/>
+                </a:solidFill>
+              </a:defRPr>
+            </a:pPr>
             <a:r>
               <a:rPr sz="1500" b="1" i="0">
                 <a:solidFill>
@@ -38980,7 +40546,13 @@
           </a:bodyPr>
           <a:lstStyle/>
           <a:p>
-            <a:pPr algn="l"/>
+            <a:pPr algn="l">
+              <a:defRPr>
+                <a:solidFill>
+                  <a:srgbClr val="00D4A8"/>
+                </a:solidFill>
+              </a:defRPr>
+            </a:pPr>
             <a:r>
               <a:rPr sz="1800" b="1" i="0">
                 <a:solidFill>
@@ -39015,7 +40587,13 @@
           </a:bodyPr>
           <a:lstStyle/>
           <a:p>
-            <a:pPr algn="l"/>
+            <a:pPr algn="l">
+              <a:defRPr>
+                <a:solidFill>
+                  <a:srgbClr val="FFFFFF"/>
+                </a:solidFill>
+              </a:defRPr>
+            </a:pPr>
             <a:r>
               <a:rPr sz="4800" b="1">
                 <a:solidFill>
@@ -39050,7 +40628,13 @@
           </a:bodyPr>
           <a:lstStyle/>
           <a:p>
-            <a:pPr algn="l"/>
+            <a:pPr algn="l">
+              <a:defRPr>
+                <a:solidFill>
+                  <a:srgbClr val="C3EFE3"/>
+                </a:solidFill>
+              </a:defRPr>
+            </a:pPr>
             <a:r>
               <a:rPr sz="2000" i="0">
                 <a:solidFill>
@@ -39259,7 +40843,13 @@
           </a:bodyPr>
           <a:lstStyle/>
           <a:p>
-            <a:pPr algn="l"/>
+            <a:pPr algn="l">
+              <a:defRPr>
+                <a:solidFill>
+                  <a:srgbClr val="1A1D23"/>
+                </a:solidFill>
+              </a:defRPr>
+            </a:pPr>
             <a:r>
               <a:rPr sz="3600" b="1">
                 <a:solidFill>
@@ -39318,7 +40908,13 @@
           </a:bodyPr>
           <a:lstStyle/>
           <a:p>
-            <a:pPr algn="ctr"/>
+            <a:pPr algn="ctr">
+              <a:defRPr>
+                <a:solidFill>
+                  <a:srgbClr val="64748B"/>
+                </a:solidFill>
+              </a:defRPr>
+            </a:pPr>
             <a:r>
               <a:rPr sz="1000" b="0" i="1">
                 <a:solidFill>
@@ -39527,7 +41123,13 @@
           </a:bodyPr>
           <a:lstStyle/>
           <a:p>
-            <a:pPr algn="l"/>
+            <a:pPr algn="l">
+              <a:defRPr>
+                <a:solidFill>
+                  <a:srgbClr val="1A1D23"/>
+                </a:solidFill>
+              </a:defRPr>
+            </a:pPr>
             <a:r>
               <a:rPr sz="3600" b="1">
                 <a:solidFill>
@@ -39566,6 +41168,11 @@
               <a:spcAft>
                 <a:spcPts val="600"/>
               </a:spcAft>
+              <a:defRPr>
+                <a:solidFill>
+                  <a:srgbClr val="1A1D23"/>
+                </a:solidFill>
+              </a:defRPr>
             </a:pPr>
             <a:r>
               <a:rPr sz="1600" b="1">
@@ -39600,6 +41207,11 @@
               <a:spcAft>
                 <a:spcPts val="600"/>
               </a:spcAft>
+              <a:defRPr>
+                <a:solidFill>
+                  <a:srgbClr val="1A1D23"/>
+                </a:solidFill>
+              </a:defRPr>
             </a:pPr>
             <a:r>
               <a:rPr sz="1600" b="1">
@@ -39634,6 +41246,11 @@
               <a:spcAft>
                 <a:spcPts val="600"/>
               </a:spcAft>
+              <a:defRPr>
+                <a:solidFill>
+                  <a:srgbClr val="1A1D23"/>
+                </a:solidFill>
+              </a:defRPr>
             </a:pPr>
             <a:r>
               <a:rPr sz="1600" b="1">
@@ -39668,6 +41285,11 @@
               <a:spcAft>
                 <a:spcPts val="600"/>
               </a:spcAft>
+              <a:defRPr>
+                <a:solidFill>
+                  <a:srgbClr val="1A1D23"/>
+                </a:solidFill>
+              </a:defRPr>
             </a:pPr>
             <a:r>
               <a:rPr sz="1600" b="1">
@@ -39702,6 +41324,11 @@
               <a:spcAft>
                 <a:spcPts val="600"/>
               </a:spcAft>
+              <a:defRPr>
+                <a:solidFill>
+                  <a:srgbClr val="1A1D23"/>
+                </a:solidFill>
+              </a:defRPr>
             </a:pPr>
             <a:r>
               <a:rPr sz="1600" b="1">
@@ -39929,7 +41556,13 @@
           </a:bodyPr>
           <a:lstStyle/>
           <a:p>
-            <a:pPr algn="l"/>
+            <a:pPr algn="l">
+              <a:defRPr>
+                <a:solidFill>
+                  <a:srgbClr val="1A1D23"/>
+                </a:solidFill>
+              </a:defRPr>
+            </a:pPr>
             <a:r>
               <a:rPr sz="3600" b="1">
                 <a:solidFill>
@@ -39968,6 +41601,11 @@
               <a:spcAft>
                 <a:spcPts val="600"/>
               </a:spcAft>
+              <a:defRPr>
+                <a:solidFill>
+                  <a:srgbClr val="1A1D23"/>
+                </a:solidFill>
+              </a:defRPr>
             </a:pPr>
             <a:r>
               <a:rPr sz="1600" b="1">
@@ -40002,6 +41640,11 @@
               <a:spcAft>
                 <a:spcPts val="600"/>
               </a:spcAft>
+              <a:defRPr>
+                <a:solidFill>
+                  <a:srgbClr val="1A1D23"/>
+                </a:solidFill>
+              </a:defRPr>
             </a:pPr>
             <a:r>
               <a:rPr sz="1600" b="1">
@@ -40036,6 +41679,11 @@
               <a:spcAft>
                 <a:spcPts val="600"/>
               </a:spcAft>
+              <a:defRPr>
+                <a:solidFill>
+                  <a:srgbClr val="1A1D23"/>
+                </a:solidFill>
+              </a:defRPr>
             </a:pPr>
             <a:r>
               <a:rPr sz="1600" b="1">
@@ -40070,6 +41718,11 @@
               <a:spcAft>
                 <a:spcPts val="600"/>
               </a:spcAft>
+              <a:defRPr>
+                <a:solidFill>
+                  <a:srgbClr val="1A1D23"/>
+                </a:solidFill>
+              </a:defRPr>
             </a:pPr>
             <a:r>
               <a:rPr sz="1600" b="1">
@@ -40104,6 +41757,11 @@
               <a:spcAft>
                 <a:spcPts val="600"/>
               </a:spcAft>
+              <a:defRPr>
+                <a:solidFill>
+                  <a:srgbClr val="1A1D23"/>
+                </a:solidFill>
+              </a:defRPr>
             </a:pPr>
             <a:r>
               <a:rPr sz="1600" b="1">
@@ -40331,7 +41989,13 @@
           </a:bodyPr>
           <a:lstStyle/>
           <a:p>
-            <a:pPr algn="l"/>
+            <a:pPr algn="l">
+              <a:defRPr>
+                <a:solidFill>
+                  <a:srgbClr val="1A1D23"/>
+                </a:solidFill>
+              </a:defRPr>
+            </a:pPr>
             <a:r>
               <a:rPr sz="3600" b="1">
                 <a:solidFill>
@@ -40370,6 +42034,11 @@
               <a:spcAft>
                 <a:spcPts val="600"/>
               </a:spcAft>
+              <a:defRPr>
+                <a:solidFill>
+                  <a:srgbClr val="1A1D23"/>
+                </a:solidFill>
+              </a:defRPr>
             </a:pPr>
             <a:r>
               <a:rPr sz="1600" b="1">
@@ -40404,6 +42073,11 @@
               <a:spcAft>
                 <a:spcPts val="600"/>
               </a:spcAft>
+              <a:defRPr>
+                <a:solidFill>
+                  <a:srgbClr val="1A1D23"/>
+                </a:solidFill>
+              </a:defRPr>
             </a:pPr>
             <a:r>
               <a:rPr sz="1600" b="1">
@@ -40438,6 +42112,11 @@
               <a:spcAft>
                 <a:spcPts val="600"/>
               </a:spcAft>
+              <a:defRPr>
+                <a:solidFill>
+                  <a:srgbClr val="1A1D23"/>
+                </a:solidFill>
+              </a:defRPr>
             </a:pPr>
             <a:r>
               <a:rPr sz="1600" b="1">
@@ -40472,6 +42151,11 @@
               <a:spcAft>
                 <a:spcPts val="600"/>
               </a:spcAft>
+              <a:defRPr>
+                <a:solidFill>
+                  <a:srgbClr val="1A1D23"/>
+                </a:solidFill>
+              </a:defRPr>
             </a:pPr>
             <a:r>
               <a:rPr sz="1600" b="1">
@@ -40506,6 +42190,11 @@
               <a:spcAft>
                 <a:spcPts val="600"/>
               </a:spcAft>
+              <a:defRPr>
+                <a:solidFill>
+                  <a:srgbClr val="1A1D23"/>
+                </a:solidFill>
+              </a:defRPr>
             </a:pPr>
             <a:r>
               <a:rPr sz="1600" b="1">
@@ -40733,7 +42422,13 @@
           </a:bodyPr>
           <a:lstStyle/>
           <a:p>
-            <a:pPr algn="l"/>
+            <a:pPr algn="l">
+              <a:defRPr>
+                <a:solidFill>
+                  <a:srgbClr val="1A1D23"/>
+                </a:solidFill>
+              </a:defRPr>
+            </a:pPr>
             <a:r>
               <a:rPr sz="3600" b="1">
                 <a:solidFill>
@@ -40772,6 +42467,11 @@
               <a:spcAft>
                 <a:spcPts val="600"/>
               </a:spcAft>
+              <a:defRPr>
+                <a:solidFill>
+                  <a:srgbClr val="1A1D23"/>
+                </a:solidFill>
+              </a:defRPr>
             </a:pPr>
             <a:r>
               <a:rPr sz="1600" b="1">
@@ -40806,6 +42506,11 @@
               <a:spcAft>
                 <a:spcPts val="600"/>
               </a:spcAft>
+              <a:defRPr>
+                <a:solidFill>
+                  <a:srgbClr val="1A1D23"/>
+                </a:solidFill>
+              </a:defRPr>
             </a:pPr>
             <a:r>
               <a:rPr sz="1600" b="1">
@@ -40840,6 +42545,11 @@
               <a:spcAft>
                 <a:spcPts val="600"/>
               </a:spcAft>
+              <a:defRPr>
+                <a:solidFill>
+                  <a:srgbClr val="1A1D23"/>
+                </a:solidFill>
+              </a:defRPr>
             </a:pPr>
             <a:r>
               <a:rPr sz="1600" b="1">
@@ -40874,6 +42584,11 @@
               <a:spcAft>
                 <a:spcPts val="600"/>
               </a:spcAft>
+              <a:defRPr>
+                <a:solidFill>
+                  <a:srgbClr val="1A1D23"/>
+                </a:solidFill>
+              </a:defRPr>
             </a:pPr>
             <a:r>
               <a:rPr sz="1600" b="1">
@@ -40908,6 +42623,11 @@
               <a:spcAft>
                 <a:spcPts val="600"/>
               </a:spcAft>
+              <a:defRPr>
+                <a:solidFill>
+                  <a:srgbClr val="1A1D23"/>
+                </a:solidFill>
+              </a:defRPr>
             </a:pPr>
             <a:r>
               <a:rPr sz="1600" b="1">
@@ -41135,7 +42855,13 @@
           </a:bodyPr>
           <a:lstStyle/>
           <a:p>
-            <a:pPr algn="l"/>
+            <a:pPr algn="l">
+              <a:defRPr>
+                <a:solidFill>
+                  <a:srgbClr val="1A1D23"/>
+                </a:solidFill>
+              </a:defRPr>
+            </a:pPr>
             <a:r>
               <a:rPr sz="3600" b="1">
                 <a:solidFill>
@@ -41170,7 +42896,13 @@
           </a:bodyPr>
           <a:lstStyle/>
           <a:p>
-            <a:pPr algn="l"/>
+            <a:pPr algn="l">
+              <a:defRPr>
+                <a:solidFill>
+                  <a:srgbClr val="64748B"/>
+                </a:solidFill>
+              </a:defRPr>
+            </a:pPr>
             <a:r>
               <a:rPr sz="1800" i="1">
                 <a:solidFill>
@@ -41229,7 +42961,13 @@
           </a:bodyPr>
           <a:lstStyle/>
           <a:p>
-            <a:pPr algn="ctr"/>
+            <a:pPr algn="ctr">
+              <a:defRPr>
+                <a:solidFill>
+                  <a:srgbClr val="64748B"/>
+                </a:solidFill>
+              </a:defRPr>
+            </a:pPr>
             <a:r>
               <a:rPr sz="1000" b="0" i="1">
                 <a:solidFill>
@@ -41438,7 +43176,13 @@
           </a:bodyPr>
           <a:lstStyle/>
           <a:p>
-            <a:pPr algn="l"/>
+            <a:pPr algn="l">
+              <a:defRPr>
+                <a:solidFill>
+                  <a:srgbClr val="1A1D23"/>
+                </a:solidFill>
+              </a:defRPr>
+            </a:pPr>
             <a:r>
               <a:rPr sz="3600" b="1">
                 <a:solidFill>
@@ -41477,6 +43221,11 @@
               <a:spcAft>
                 <a:spcPts val="600"/>
               </a:spcAft>
+              <a:defRPr>
+                <a:solidFill>
+                  <a:srgbClr val="1A1D23"/>
+                </a:solidFill>
+              </a:defRPr>
             </a:pPr>
             <a:r>
               <a:rPr sz="1600" b="1">
@@ -41511,6 +43260,11 @@
               <a:spcAft>
                 <a:spcPts val="600"/>
               </a:spcAft>
+              <a:defRPr>
+                <a:solidFill>
+                  <a:srgbClr val="1A1D23"/>
+                </a:solidFill>
+              </a:defRPr>
             </a:pPr>
             <a:r>
               <a:rPr sz="1600" b="1">
@@ -41545,6 +43299,11 @@
               <a:spcAft>
                 <a:spcPts val="600"/>
               </a:spcAft>
+              <a:defRPr>
+                <a:solidFill>
+                  <a:srgbClr val="1A1D23"/>
+                </a:solidFill>
+              </a:defRPr>
             </a:pPr>
             <a:r>
               <a:rPr sz="1600" b="1">
@@ -41579,6 +43338,11 @@
               <a:spcAft>
                 <a:spcPts val="600"/>
               </a:spcAft>
+              <a:defRPr>
+                <a:solidFill>
+                  <a:srgbClr val="1A1D23"/>
+                </a:solidFill>
+              </a:defRPr>
             </a:pPr>
             <a:r>
               <a:rPr sz="1600" b="1">
@@ -41613,6 +43377,11 @@
               <a:spcAft>
                 <a:spcPts val="600"/>
               </a:spcAft>
+              <a:defRPr>
+                <a:solidFill>
+                  <a:srgbClr val="1A1D23"/>
+                </a:solidFill>
+              </a:defRPr>
             </a:pPr>
             <a:r>
               <a:rPr sz="1600" b="1">
@@ -41840,7 +43609,13 @@
           </a:bodyPr>
           <a:lstStyle/>
           <a:p>
-            <a:pPr algn="l"/>
+            <a:pPr algn="l">
+              <a:defRPr>
+                <a:solidFill>
+                  <a:srgbClr val="1A1D23"/>
+                </a:solidFill>
+              </a:defRPr>
+            </a:pPr>
             <a:r>
               <a:rPr sz="3600" b="1">
                 <a:solidFill>
@@ -41879,6 +43654,11 @@
               <a:spcAft>
                 <a:spcPts val="600"/>
               </a:spcAft>
+              <a:defRPr>
+                <a:solidFill>
+                  <a:srgbClr val="1A1D23"/>
+                </a:solidFill>
+              </a:defRPr>
             </a:pPr>
             <a:r>
               <a:rPr sz="1600" b="1">
@@ -41913,6 +43693,11 @@
               <a:spcAft>
                 <a:spcPts val="600"/>
               </a:spcAft>
+              <a:defRPr>
+                <a:solidFill>
+                  <a:srgbClr val="1A1D23"/>
+                </a:solidFill>
+              </a:defRPr>
             </a:pPr>
             <a:r>
               <a:rPr sz="1600" b="1">
@@ -41947,6 +43732,11 @@
               <a:spcAft>
                 <a:spcPts val="600"/>
               </a:spcAft>
+              <a:defRPr>
+                <a:solidFill>
+                  <a:srgbClr val="1A1D23"/>
+                </a:solidFill>
+              </a:defRPr>
             </a:pPr>
             <a:r>
               <a:rPr sz="1600" b="1">
@@ -41981,6 +43771,11 @@
               <a:spcAft>
                 <a:spcPts val="600"/>
               </a:spcAft>
+              <a:defRPr>
+                <a:solidFill>
+                  <a:srgbClr val="1A1D23"/>
+                </a:solidFill>
+              </a:defRPr>
             </a:pPr>
             <a:r>
               <a:rPr sz="1600" b="1">
@@ -42015,6 +43810,11 @@
               <a:spcAft>
                 <a:spcPts val="600"/>
               </a:spcAft>
+              <a:defRPr>
+                <a:solidFill>
+                  <a:srgbClr val="1A1D23"/>
+                </a:solidFill>
+              </a:defRPr>
             </a:pPr>
             <a:r>
               <a:rPr sz="1600" b="1">
@@ -42242,7 +44042,13 @@
           </a:bodyPr>
           <a:lstStyle/>
           <a:p>
-            <a:pPr algn="l"/>
+            <a:pPr algn="l">
+              <a:defRPr>
+                <a:solidFill>
+                  <a:srgbClr val="1A1D23"/>
+                </a:solidFill>
+              </a:defRPr>
+            </a:pPr>
             <a:r>
               <a:rPr sz="3600" b="1">
                 <a:solidFill>
@@ -42281,6 +44087,11 @@
               <a:spcAft>
                 <a:spcPts val="600"/>
               </a:spcAft>
+              <a:defRPr>
+                <a:solidFill>
+                  <a:srgbClr val="1A1D23"/>
+                </a:solidFill>
+              </a:defRPr>
             </a:pPr>
             <a:r>
               <a:rPr sz="1600" b="1">
@@ -42315,6 +44126,11 @@
               <a:spcAft>
                 <a:spcPts val="600"/>
               </a:spcAft>
+              <a:defRPr>
+                <a:solidFill>
+                  <a:srgbClr val="1A1D23"/>
+                </a:solidFill>
+              </a:defRPr>
             </a:pPr>
             <a:r>
               <a:rPr sz="1600" b="1">
@@ -42349,6 +44165,11 @@
               <a:spcAft>
                 <a:spcPts val="600"/>
               </a:spcAft>
+              <a:defRPr>
+                <a:solidFill>
+                  <a:srgbClr val="1A1D23"/>
+                </a:solidFill>
+              </a:defRPr>
             </a:pPr>
             <a:r>
               <a:rPr sz="1600" b="1">
@@ -42383,6 +44204,11 @@
               <a:spcAft>
                 <a:spcPts val="600"/>
               </a:spcAft>
+              <a:defRPr>
+                <a:solidFill>
+                  <a:srgbClr val="1A1D23"/>
+                </a:solidFill>
+              </a:defRPr>
             </a:pPr>
             <a:r>
               <a:rPr sz="1600" b="1">
@@ -42417,6 +44243,11 @@
               <a:spcAft>
                 <a:spcPts val="600"/>
               </a:spcAft>
+              <a:defRPr>
+                <a:solidFill>
+                  <a:srgbClr val="1A1D23"/>
+                </a:solidFill>
+              </a:defRPr>
             </a:pPr>
             <a:r>
               <a:rPr sz="1600" b="1">
@@ -42644,7 +44475,13 @@
           </a:bodyPr>
           <a:lstStyle/>
           <a:p>
-            <a:pPr algn="l"/>
+            <a:pPr algn="l">
+              <a:defRPr>
+                <a:solidFill>
+                  <a:srgbClr val="1A1D23"/>
+                </a:solidFill>
+              </a:defRPr>
+            </a:pPr>
             <a:r>
               <a:rPr sz="3600" b="1">
                 <a:solidFill>
@@ -42683,6 +44520,11 @@
               <a:spcAft>
                 <a:spcPts val="600"/>
               </a:spcAft>
+              <a:defRPr>
+                <a:solidFill>
+                  <a:srgbClr val="1A1D23"/>
+                </a:solidFill>
+              </a:defRPr>
             </a:pPr>
             <a:r>
               <a:rPr sz="1600" b="1">
@@ -42717,6 +44559,11 @@
               <a:spcAft>
                 <a:spcPts val="600"/>
               </a:spcAft>
+              <a:defRPr>
+                <a:solidFill>
+                  <a:srgbClr val="1A1D23"/>
+                </a:solidFill>
+              </a:defRPr>
             </a:pPr>
             <a:r>
               <a:rPr sz="1600" b="1">
@@ -42751,6 +44598,11 @@
               <a:spcAft>
                 <a:spcPts val="600"/>
               </a:spcAft>
+              <a:defRPr>
+                <a:solidFill>
+                  <a:srgbClr val="1A1D23"/>
+                </a:solidFill>
+              </a:defRPr>
             </a:pPr>
             <a:r>
               <a:rPr sz="1600" b="1">
@@ -42785,6 +44637,11 @@
               <a:spcAft>
                 <a:spcPts val="600"/>
               </a:spcAft>
+              <a:defRPr>
+                <a:solidFill>
+                  <a:srgbClr val="1A1D23"/>
+                </a:solidFill>
+              </a:defRPr>
             </a:pPr>
             <a:r>
               <a:rPr sz="1600" b="1">
@@ -42819,6 +44676,11 @@
               <a:spcAft>
                 <a:spcPts val="600"/>
               </a:spcAft>
+              <a:defRPr>
+                <a:solidFill>
+                  <a:srgbClr val="1A1D23"/>
+                </a:solidFill>
+              </a:defRPr>
             </a:pPr>
             <a:r>
               <a:rPr sz="1600" b="1">
@@ -43046,7 +44908,13 @@
           </a:bodyPr>
           <a:lstStyle/>
           <a:p>
-            <a:pPr algn="l"/>
+            <a:pPr algn="l">
+              <a:defRPr>
+                <a:solidFill>
+                  <a:srgbClr val="1A1D23"/>
+                </a:solidFill>
+              </a:defRPr>
+            </a:pPr>
             <a:r>
               <a:rPr sz="3600" b="1">
                 <a:solidFill>
@@ -43085,6 +44953,11 @@
               <a:spcAft>
                 <a:spcPts val="600"/>
               </a:spcAft>
+              <a:defRPr>
+                <a:solidFill>
+                  <a:srgbClr val="1A1D23"/>
+                </a:solidFill>
+              </a:defRPr>
             </a:pPr>
             <a:r>
               <a:rPr sz="1600" b="1">
@@ -43119,6 +44992,11 @@
               <a:spcAft>
                 <a:spcPts val="600"/>
               </a:spcAft>
+              <a:defRPr>
+                <a:solidFill>
+                  <a:srgbClr val="1A1D23"/>
+                </a:solidFill>
+              </a:defRPr>
             </a:pPr>
             <a:r>
               <a:rPr sz="1600" b="1">
@@ -43153,6 +45031,11 @@
               <a:spcAft>
                 <a:spcPts val="600"/>
               </a:spcAft>
+              <a:defRPr>
+                <a:solidFill>
+                  <a:srgbClr val="1A1D23"/>
+                </a:solidFill>
+              </a:defRPr>
             </a:pPr>
             <a:r>
               <a:rPr sz="1600" b="1">
@@ -43187,6 +45070,11 @@
               <a:spcAft>
                 <a:spcPts val="600"/>
               </a:spcAft>
+              <a:defRPr>
+                <a:solidFill>
+                  <a:srgbClr val="1A1D23"/>
+                </a:solidFill>
+              </a:defRPr>
             </a:pPr>
             <a:r>
               <a:rPr sz="1600" b="1">
@@ -43221,6 +45109,11 @@
               <a:spcAft>
                 <a:spcPts val="600"/>
               </a:spcAft>
+              <a:defRPr>
+                <a:solidFill>
+                  <a:srgbClr val="1A1D23"/>
+                </a:solidFill>
+              </a:defRPr>
             </a:pPr>
             <a:r>
               <a:rPr sz="1600" b="1">
@@ -43448,7 +45341,13 @@
           </a:bodyPr>
           <a:lstStyle/>
           <a:p>
-            <a:pPr algn="l"/>
+            <a:pPr algn="l">
+              <a:defRPr>
+                <a:solidFill>
+                  <a:srgbClr val="1A1D23"/>
+                </a:solidFill>
+              </a:defRPr>
+            </a:pPr>
             <a:r>
               <a:rPr sz="3600" b="1">
                 <a:solidFill>
@@ -43567,7 +45466,13 @@
           </a:bodyPr>
           <a:lstStyle/>
           <a:p>
-            <a:pPr algn="l"/>
+            <a:pPr algn="l">
+              <a:defRPr>
+                <a:solidFill>
+                  <a:srgbClr val="64748B"/>
+                </a:solidFill>
+              </a:defRPr>
+            </a:pPr>
             <a:r>
               <a:rPr sz="1200" b="0" i="1">
                 <a:solidFill>
@@ -43776,7 +45681,13 @@
           </a:bodyPr>
           <a:lstStyle/>
           <a:p>
-            <a:pPr algn="l"/>
+            <a:pPr algn="l">
+              <a:defRPr>
+                <a:solidFill>
+                  <a:srgbClr val="00D4A8"/>
+                </a:solidFill>
+              </a:defRPr>
+            </a:pPr>
             <a:r>
               <a:rPr sz="1800" b="1" i="0">
                 <a:solidFill>
@@ -43811,7 +45722,13 @@
           </a:bodyPr>
           <a:lstStyle/>
           <a:p>
-            <a:pPr algn="l"/>
+            <a:pPr algn="l">
+              <a:defRPr>
+                <a:solidFill>
+                  <a:srgbClr val="FFFFFF"/>
+                </a:solidFill>
+              </a:defRPr>
+            </a:pPr>
             <a:r>
               <a:rPr sz="4800" b="1">
                 <a:solidFill>
@@ -43846,7 +45763,13 @@
           </a:bodyPr>
           <a:lstStyle/>
           <a:p>
-            <a:pPr algn="l"/>
+            <a:pPr algn="l">
+              <a:defRPr>
+                <a:solidFill>
+                  <a:srgbClr val="C3EFE3"/>
+                </a:solidFill>
+              </a:defRPr>
+            </a:pPr>
             <a:r>
               <a:rPr sz="2000" i="0">
                 <a:solidFill>
@@ -44055,7 +45978,13 @@
           </a:bodyPr>
           <a:lstStyle/>
           <a:p>
-            <a:pPr algn="l"/>
+            <a:pPr algn="l">
+              <a:defRPr>
+                <a:solidFill>
+                  <a:srgbClr val="1A1D23"/>
+                </a:solidFill>
+              </a:defRPr>
+            </a:pPr>
             <a:r>
               <a:rPr sz="3600" b="1">
                 <a:solidFill>
@@ -44094,6 +46023,11 @@
               <a:spcAft>
                 <a:spcPts val="600"/>
               </a:spcAft>
+              <a:defRPr>
+                <a:solidFill>
+                  <a:srgbClr val="1A1D23"/>
+                </a:solidFill>
+              </a:defRPr>
             </a:pPr>
             <a:r>
               <a:rPr sz="1600" b="1">
@@ -44128,6 +46062,11 @@
               <a:spcAft>
                 <a:spcPts val="600"/>
               </a:spcAft>
+              <a:defRPr>
+                <a:solidFill>
+                  <a:srgbClr val="1A1D23"/>
+                </a:solidFill>
+              </a:defRPr>
             </a:pPr>
             <a:r>
               <a:rPr sz="1600" b="1">
@@ -44162,6 +46101,11 @@
               <a:spcAft>
                 <a:spcPts val="600"/>
               </a:spcAft>
+              <a:defRPr>
+                <a:solidFill>
+                  <a:srgbClr val="1A1D23"/>
+                </a:solidFill>
+              </a:defRPr>
             </a:pPr>
             <a:r>
               <a:rPr sz="1600" b="1">
@@ -44196,6 +46140,11 @@
               <a:spcAft>
                 <a:spcPts val="600"/>
               </a:spcAft>
+              <a:defRPr>
+                <a:solidFill>
+                  <a:srgbClr val="1A1D23"/>
+                </a:solidFill>
+              </a:defRPr>
             </a:pPr>
             <a:r>
               <a:rPr sz="1600" b="1">
@@ -44230,6 +46179,11 @@
               <a:spcAft>
                 <a:spcPts val="600"/>
               </a:spcAft>
+              <a:defRPr>
+                <a:solidFill>
+                  <a:srgbClr val="1A1D23"/>
+                </a:solidFill>
+              </a:defRPr>
             </a:pPr>
             <a:r>
               <a:rPr sz="1600" b="1">
@@ -44264,6 +46218,11 @@
               <a:spcAft>
                 <a:spcPts val="600"/>
               </a:spcAft>
+              <a:defRPr>
+                <a:solidFill>
+                  <a:srgbClr val="1A1D23"/>
+                </a:solidFill>
+              </a:defRPr>
             </a:pPr>
             <a:r>
               <a:rPr sz="1600" b="1">
@@ -44491,7 +46450,13 @@
           </a:bodyPr>
           <a:lstStyle/>
           <a:p>
-            <a:pPr algn="l"/>
+            <a:pPr algn="l">
+              <a:defRPr>
+                <a:solidFill>
+                  <a:srgbClr val="1A1D23"/>
+                </a:solidFill>
+              </a:defRPr>
+            </a:pPr>
             <a:r>
               <a:rPr sz="3600" b="1">
                 <a:solidFill>
@@ -44550,7 +46515,13 @@
           </a:bodyPr>
           <a:lstStyle/>
           <a:p>
-            <a:pPr algn="ctr"/>
+            <a:pPr algn="ctr">
+              <a:defRPr>
+                <a:solidFill>
+                  <a:srgbClr val="64748B"/>
+                </a:solidFill>
+              </a:defRPr>
+            </a:pPr>
             <a:r>
               <a:rPr sz="1000" b="0" i="1">
                 <a:solidFill>
@@ -44759,7 +46730,13 @@
           </a:bodyPr>
           <a:lstStyle/>
           <a:p>
-            <a:pPr algn="l"/>
+            <a:pPr algn="l">
+              <a:defRPr>
+                <a:solidFill>
+                  <a:srgbClr val="1A1D23"/>
+                </a:solidFill>
+              </a:defRPr>
+            </a:pPr>
             <a:r>
               <a:rPr sz="3600" b="1">
                 <a:solidFill>
@@ -44794,7 +46771,13 @@
           </a:bodyPr>
           <a:lstStyle/>
           <a:p>
-            <a:pPr algn="l"/>
+            <a:pPr algn="l">
+              <a:defRPr>
+                <a:solidFill>
+                  <a:srgbClr val="64748B"/>
+                </a:solidFill>
+              </a:defRPr>
+            </a:pPr>
             <a:r>
               <a:rPr sz="1800" i="1">
                 <a:solidFill>
@@ -45313,7 +47296,13 @@
           </a:bodyPr>
           <a:lstStyle/>
           <a:p>
-            <a:pPr algn="l"/>
+            <a:pPr algn="l">
+              <a:defRPr>
+                <a:solidFill>
+                  <a:srgbClr val="1A1D23"/>
+                </a:solidFill>
+              </a:defRPr>
+            </a:pPr>
             <a:r>
               <a:rPr sz="3600" b="1">
                 <a:solidFill>
@@ -45348,7 +47337,13 @@
           </a:bodyPr>
           <a:lstStyle/>
           <a:p>
-            <a:pPr algn="l"/>
+            <a:pPr algn="l">
+              <a:defRPr>
+                <a:solidFill>
+                  <a:srgbClr val="64748B"/>
+                </a:solidFill>
+              </a:defRPr>
+            </a:pPr>
             <a:r>
               <a:rPr sz="1800" i="1">
                 <a:solidFill>
@@ -46125,7 +48120,13 @@
           </a:bodyPr>
           <a:lstStyle/>
           <a:p>
-            <a:pPr algn="l"/>
+            <a:pPr algn="l">
+              <a:defRPr>
+                <a:solidFill>
+                  <a:srgbClr val="1A1D23"/>
+                </a:solidFill>
+              </a:defRPr>
+            </a:pPr>
             <a:r>
               <a:rPr sz="3600" b="1">
                 <a:solidFill>
@@ -46740,7 +48741,13 @@
           </a:bodyPr>
           <a:lstStyle/>
           <a:p>
-            <a:pPr algn="l"/>
+            <a:pPr algn="l">
+              <a:defRPr>
+                <a:solidFill>
+                  <a:srgbClr val="1A1D23"/>
+                </a:solidFill>
+              </a:defRPr>
+            </a:pPr>
             <a:r>
               <a:rPr sz="3600" b="1">
                 <a:solidFill>
@@ -46775,7 +48782,13 @@
           </a:bodyPr>
           <a:lstStyle/>
           <a:p>
-            <a:pPr algn="l"/>
+            <a:pPr algn="l">
+              <a:defRPr>
+                <a:solidFill>
+                  <a:srgbClr val="64748B"/>
+                </a:solidFill>
+              </a:defRPr>
+            </a:pPr>
             <a:r>
               <a:rPr sz="1800" i="1">
                 <a:solidFill>
@@ -47358,7 +49371,13 @@
           </a:bodyPr>
           <a:lstStyle/>
           <a:p>
-            <a:pPr algn="l"/>
+            <a:pPr algn="l">
+              <a:defRPr>
+                <a:solidFill>
+                  <a:srgbClr val="1A1D23"/>
+                </a:solidFill>
+              </a:defRPr>
+            </a:pPr>
             <a:r>
               <a:rPr sz="3600" b="1">
                 <a:solidFill>
@@ -47397,6 +49416,11 @@
               <a:spcAft>
                 <a:spcPts val="600"/>
               </a:spcAft>
+              <a:defRPr>
+                <a:solidFill>
+                  <a:srgbClr val="1A1D23"/>
+                </a:solidFill>
+              </a:defRPr>
             </a:pPr>
             <a:r>
               <a:rPr sz="1600" b="1">
@@ -47431,6 +49455,11 @@
               <a:spcAft>
                 <a:spcPts val="600"/>
               </a:spcAft>
+              <a:defRPr>
+                <a:solidFill>
+                  <a:srgbClr val="1A1D23"/>
+                </a:solidFill>
+              </a:defRPr>
             </a:pPr>
             <a:r>
               <a:rPr sz="1600" b="1">
@@ -47465,6 +49494,11 @@
               <a:spcAft>
                 <a:spcPts val="600"/>
               </a:spcAft>
+              <a:defRPr>
+                <a:solidFill>
+                  <a:srgbClr val="1A1D23"/>
+                </a:solidFill>
+              </a:defRPr>
             </a:pPr>
             <a:r>
               <a:rPr sz="1600" b="1">
@@ -47499,6 +49533,11 @@
               <a:spcAft>
                 <a:spcPts val="600"/>
               </a:spcAft>
+              <a:defRPr>
+                <a:solidFill>
+                  <a:srgbClr val="1A1D23"/>
+                </a:solidFill>
+              </a:defRPr>
             </a:pPr>
             <a:r>
               <a:rPr sz="1600" b="1">
@@ -47533,6 +49572,11 @@
               <a:spcAft>
                 <a:spcPts val="600"/>
               </a:spcAft>
+              <a:defRPr>
+                <a:solidFill>
+                  <a:srgbClr val="1A1D23"/>
+                </a:solidFill>
+              </a:defRPr>
             </a:pPr>
             <a:r>
               <a:rPr sz="1600" b="1">
@@ -47567,6 +49611,11 @@
               <a:spcAft>
                 <a:spcPts val="600"/>
               </a:spcAft>
+              <a:defRPr>
+                <a:solidFill>
+                  <a:srgbClr val="1A1D23"/>
+                </a:solidFill>
+              </a:defRPr>
             </a:pPr>
             <a:r>
               <a:rPr sz="1600" b="1">
@@ -47794,7 +49843,13 @@
           </a:bodyPr>
           <a:lstStyle/>
           <a:p>
-            <a:pPr algn="l"/>
+            <a:pPr algn="l">
+              <a:defRPr>
+                <a:solidFill>
+                  <a:srgbClr val="1A1D23"/>
+                </a:solidFill>
+              </a:defRPr>
+            </a:pPr>
             <a:r>
               <a:rPr sz="3600" b="1">
                 <a:solidFill>
@@ -47833,6 +49888,11 @@
               <a:spcAft>
                 <a:spcPts val="600"/>
               </a:spcAft>
+              <a:defRPr>
+                <a:solidFill>
+                  <a:srgbClr val="1A1D23"/>
+                </a:solidFill>
+              </a:defRPr>
             </a:pPr>
             <a:r>
               <a:rPr sz="1600" b="1">
@@ -47867,6 +49927,11 @@
               <a:spcAft>
                 <a:spcPts val="600"/>
               </a:spcAft>
+              <a:defRPr>
+                <a:solidFill>
+                  <a:srgbClr val="1A1D23"/>
+                </a:solidFill>
+              </a:defRPr>
             </a:pPr>
             <a:r>
               <a:rPr sz="1600" b="1">
@@ -47901,6 +49966,11 @@
               <a:spcAft>
                 <a:spcPts val="600"/>
               </a:spcAft>
+              <a:defRPr>
+                <a:solidFill>
+                  <a:srgbClr val="1A1D23"/>
+                </a:solidFill>
+              </a:defRPr>
             </a:pPr>
             <a:r>
               <a:rPr sz="1600" b="1">
@@ -47935,6 +50005,11 @@
               <a:spcAft>
                 <a:spcPts val="600"/>
               </a:spcAft>
+              <a:defRPr>
+                <a:solidFill>
+                  <a:srgbClr val="1A1D23"/>
+                </a:solidFill>
+              </a:defRPr>
             </a:pPr>
             <a:r>
               <a:rPr sz="1600" b="1">
@@ -47969,6 +50044,11 @@
               <a:spcAft>
                 <a:spcPts val="600"/>
               </a:spcAft>
+              <a:defRPr>
+                <a:solidFill>
+                  <a:srgbClr val="1A1D23"/>
+                </a:solidFill>
+              </a:defRPr>
             </a:pPr>
             <a:r>
               <a:rPr sz="1600" b="1">
@@ -48003,6 +50083,11 @@
               <a:spcAft>
                 <a:spcPts val="600"/>
               </a:spcAft>
+              <a:defRPr>
+                <a:solidFill>
+                  <a:srgbClr val="1A1D23"/>
+                </a:solidFill>
+              </a:defRPr>
             </a:pPr>
             <a:r>
               <a:rPr sz="1600" b="1">
@@ -48230,7 +50315,13 @@
           </a:bodyPr>
           <a:lstStyle/>
           <a:p>
-            <a:pPr algn="l"/>
+            <a:pPr algn="l">
+              <a:defRPr>
+                <a:solidFill>
+                  <a:srgbClr val="1A1D23"/>
+                </a:solidFill>
+              </a:defRPr>
+            </a:pPr>
             <a:r>
               <a:rPr sz="3600" b="1">
                 <a:solidFill>
@@ -48265,7 +50356,13 @@
           </a:bodyPr>
           <a:lstStyle/>
           <a:p>
-            <a:pPr algn="l"/>
+            <a:pPr algn="l">
+              <a:defRPr>
+                <a:solidFill>
+                  <a:srgbClr val="64748B"/>
+                </a:solidFill>
+              </a:defRPr>
+            </a:pPr>
             <a:r>
               <a:rPr sz="1800" i="1">
                 <a:solidFill>
@@ -48848,7 +50945,13 @@
           </a:bodyPr>
           <a:lstStyle/>
           <a:p>
-            <a:pPr algn="l"/>
+            <a:pPr algn="l">
+              <a:defRPr>
+                <a:solidFill>
+                  <a:srgbClr val="1A1D23"/>
+                </a:solidFill>
+              </a:defRPr>
+            </a:pPr>
             <a:r>
               <a:rPr sz="3600" b="1">
                 <a:solidFill>
@@ -48883,7 +50986,13 @@
           </a:bodyPr>
           <a:lstStyle/>
           <a:p>
-            <a:pPr algn="l"/>
+            <a:pPr algn="l">
+              <a:defRPr>
+                <a:solidFill>
+                  <a:srgbClr val="64748B"/>
+                </a:solidFill>
+              </a:defRPr>
+            </a:pPr>
             <a:r>
               <a:rPr sz="1800" i="1">
                 <a:solidFill>
@@ -49402,7 +51511,13 @@
           </a:bodyPr>
           <a:lstStyle/>
           <a:p>
-            <a:pPr algn="l"/>
+            <a:pPr algn="l">
+              <a:defRPr>
+                <a:solidFill>
+                  <a:srgbClr val="1A1D23"/>
+                </a:solidFill>
+              </a:defRPr>
+            </a:pPr>
             <a:r>
               <a:rPr sz="3600" b="1">
                 <a:solidFill>
@@ -49441,6 +51556,11 @@
               <a:spcAft>
                 <a:spcPts val="600"/>
               </a:spcAft>
+              <a:defRPr>
+                <a:solidFill>
+                  <a:srgbClr val="1A1D23"/>
+                </a:solidFill>
+              </a:defRPr>
             </a:pPr>
             <a:r>
               <a:rPr sz="1600" b="1">
@@ -49475,6 +51595,11 @@
               <a:spcAft>
                 <a:spcPts val="600"/>
               </a:spcAft>
+              <a:defRPr>
+                <a:solidFill>
+                  <a:srgbClr val="1A1D23"/>
+                </a:solidFill>
+              </a:defRPr>
             </a:pPr>
             <a:r>
               <a:rPr sz="1600" b="1">
@@ -49509,6 +51634,11 @@
               <a:spcAft>
                 <a:spcPts val="600"/>
               </a:spcAft>
+              <a:defRPr>
+                <a:solidFill>
+                  <a:srgbClr val="1A1D23"/>
+                </a:solidFill>
+              </a:defRPr>
             </a:pPr>
             <a:r>
               <a:rPr sz="1600" b="1">
@@ -49543,6 +51673,11 @@
               <a:spcAft>
                 <a:spcPts val="600"/>
               </a:spcAft>
+              <a:defRPr>
+                <a:solidFill>
+                  <a:srgbClr val="1A1D23"/>
+                </a:solidFill>
+              </a:defRPr>
             </a:pPr>
             <a:r>
               <a:rPr sz="1600" b="1">
@@ -49577,6 +51712,11 @@
               <a:spcAft>
                 <a:spcPts val="600"/>
               </a:spcAft>
+              <a:defRPr>
+                <a:solidFill>
+                  <a:srgbClr val="1A1D23"/>
+                </a:solidFill>
+              </a:defRPr>
             </a:pPr>
             <a:r>
               <a:rPr sz="1600" b="1">
@@ -49804,7 +51944,13 @@
           </a:bodyPr>
           <a:lstStyle/>
           <a:p>
-            <a:pPr algn="l"/>
+            <a:pPr algn="l">
+              <a:defRPr>
+                <a:solidFill>
+                  <a:srgbClr val="1A1D23"/>
+                </a:solidFill>
+              </a:defRPr>
+            </a:pPr>
             <a:r>
               <a:rPr sz="3600" b="1">
                 <a:solidFill>
@@ -49929,7 +52075,13 @@
           </a:bodyPr>
           <a:lstStyle/>
           <a:p>
-            <a:pPr algn="ctr"/>
+            <a:pPr algn="ctr">
+              <a:defRPr>
+                <a:solidFill>
+                  <a:srgbClr val="FFFFFF"/>
+                </a:solidFill>
+              </a:defRPr>
+            </a:pPr>
             <a:r>
               <a:rPr sz="1500" b="1" i="0">
                 <a:solidFill>
@@ -50269,7 +52421,13 @@
           </a:bodyPr>
           <a:lstStyle/>
           <a:p>
-            <a:pPr algn="ctr"/>
+            <a:pPr algn="ctr">
+              <a:defRPr>
+                <a:solidFill>
+                  <a:srgbClr val="FFFFFF"/>
+                </a:solidFill>
+              </a:defRPr>
+            </a:pPr>
             <a:r>
               <a:rPr sz="1500" b="1" i="0">
                 <a:solidFill>
@@ -50693,7 +52851,13 @@
           </a:bodyPr>
           <a:lstStyle/>
           <a:p>
-            <a:pPr algn="l"/>
+            <a:pPr algn="l">
+              <a:defRPr>
+                <a:solidFill>
+                  <a:srgbClr val="00D4A8"/>
+                </a:solidFill>
+              </a:defRPr>
+            </a:pPr>
             <a:r>
               <a:rPr sz="1800" b="1" i="0">
                 <a:solidFill>
@@ -50728,7 +52892,13 @@
           </a:bodyPr>
           <a:lstStyle/>
           <a:p>
-            <a:pPr algn="l"/>
+            <a:pPr algn="l">
+              <a:defRPr>
+                <a:solidFill>
+                  <a:srgbClr val="FFFFFF"/>
+                </a:solidFill>
+              </a:defRPr>
+            </a:pPr>
             <a:r>
               <a:rPr sz="4800" b="1">
                 <a:solidFill>
@@ -50763,7 +52933,13 @@
           </a:bodyPr>
           <a:lstStyle/>
           <a:p>
-            <a:pPr algn="l"/>
+            <a:pPr algn="l">
+              <a:defRPr>
+                <a:solidFill>
+                  <a:srgbClr val="C3EFE3"/>
+                </a:solidFill>
+              </a:defRPr>
+            </a:pPr>
             <a:r>
               <a:rPr sz="2000" i="0">
                 <a:solidFill>
@@ -50972,7 +53148,13 @@
           </a:bodyPr>
           <a:lstStyle/>
           <a:p>
-            <a:pPr algn="l"/>
+            <a:pPr algn="l">
+              <a:defRPr>
+                <a:solidFill>
+                  <a:srgbClr val="1A1D23"/>
+                </a:solidFill>
+              </a:defRPr>
+            </a:pPr>
             <a:r>
               <a:rPr sz="3600" b="1">
                 <a:solidFill>
@@ -51011,6 +53193,11 @@
               <a:spcAft>
                 <a:spcPts val="600"/>
               </a:spcAft>
+              <a:defRPr>
+                <a:solidFill>
+                  <a:srgbClr val="1A1D23"/>
+                </a:solidFill>
+              </a:defRPr>
             </a:pPr>
             <a:r>
               <a:rPr sz="1600" b="1">
@@ -51045,6 +53232,11 @@
               <a:spcAft>
                 <a:spcPts val="600"/>
               </a:spcAft>
+              <a:defRPr>
+                <a:solidFill>
+                  <a:srgbClr val="1A1D23"/>
+                </a:solidFill>
+              </a:defRPr>
             </a:pPr>
             <a:r>
               <a:rPr sz="1600" b="1">
@@ -51079,6 +53271,11 @@
               <a:spcAft>
                 <a:spcPts val="600"/>
               </a:spcAft>
+              <a:defRPr>
+                <a:solidFill>
+                  <a:srgbClr val="1A1D23"/>
+                </a:solidFill>
+              </a:defRPr>
             </a:pPr>
             <a:r>
               <a:rPr sz="1600" b="1">
@@ -51113,6 +53310,11 @@
               <a:spcAft>
                 <a:spcPts val="600"/>
               </a:spcAft>
+              <a:defRPr>
+                <a:solidFill>
+                  <a:srgbClr val="1A1D23"/>
+                </a:solidFill>
+              </a:defRPr>
             </a:pPr>
             <a:r>
               <a:rPr sz="1600" b="1">
@@ -51147,6 +53349,11 @@
               <a:spcAft>
                 <a:spcPts val="600"/>
               </a:spcAft>
+              <a:defRPr>
+                <a:solidFill>
+                  <a:srgbClr val="1A1D23"/>
+                </a:solidFill>
+              </a:defRPr>
             </a:pPr>
             <a:r>
               <a:rPr sz="1600" b="1">
@@ -51374,7 +53581,13 @@
           </a:bodyPr>
           <a:lstStyle/>
           <a:p>
-            <a:pPr algn="l"/>
+            <a:pPr algn="l">
+              <a:defRPr>
+                <a:solidFill>
+                  <a:srgbClr val="1A1D23"/>
+                </a:solidFill>
+              </a:defRPr>
+            </a:pPr>
             <a:r>
               <a:rPr sz="3600" b="1">
                 <a:solidFill>
@@ -51409,7 +53622,13 @@
           </a:bodyPr>
           <a:lstStyle/>
           <a:p>
-            <a:pPr algn="l"/>
+            <a:pPr algn="l">
+              <a:defRPr>
+                <a:solidFill>
+                  <a:srgbClr val="64748B"/>
+                </a:solidFill>
+              </a:defRPr>
+            </a:pPr>
             <a:r>
               <a:rPr sz="1800" i="1">
                 <a:solidFill>
@@ -52366,7 +54585,13 @@
           </a:bodyPr>
           <a:lstStyle/>
           <a:p>
-            <a:pPr algn="l"/>
+            <a:pPr algn="l">
+              <a:defRPr>
+                <a:solidFill>
+                  <a:srgbClr val="1A1D23"/>
+                </a:solidFill>
+              </a:defRPr>
+            </a:pPr>
             <a:r>
               <a:rPr sz="3600" b="1">
                 <a:solidFill>
@@ -52401,7 +54626,13 @@
           </a:bodyPr>
           <a:lstStyle/>
           <a:p>
-            <a:pPr algn="l"/>
+            <a:pPr algn="l">
+              <a:defRPr>
+                <a:solidFill>
+                  <a:srgbClr val="64748B"/>
+                </a:solidFill>
+              </a:defRPr>
+            </a:pPr>
             <a:r>
               <a:rPr sz="1800" i="1">
                 <a:solidFill>
@@ -53181,7 +55412,13 @@
           </a:bodyPr>
           <a:lstStyle/>
           <a:p>
-            <a:pPr algn="l"/>
+            <a:pPr algn="l">
+              <a:defRPr>
+                <a:solidFill>
+                  <a:srgbClr val="1A1D23"/>
+                </a:solidFill>
+              </a:defRPr>
+            </a:pPr>
             <a:r>
               <a:rPr sz="3600" b="1">
                 <a:solidFill>
@@ -53240,7 +55477,13 @@
           </a:bodyPr>
           <a:lstStyle/>
           <a:p>
-            <a:pPr algn="ctr"/>
+            <a:pPr algn="ctr">
+              <a:defRPr>
+                <a:solidFill>
+                  <a:srgbClr val="64748B"/>
+                </a:solidFill>
+              </a:defRPr>
+            </a:pPr>
             <a:r>
               <a:rPr sz="1000" b="0" i="1">
                 <a:solidFill>
@@ -53449,7 +55692,13 @@
           </a:bodyPr>
           <a:lstStyle/>
           <a:p>
-            <a:pPr algn="l"/>
+            <a:pPr algn="l">
+              <a:defRPr>
+                <a:solidFill>
+                  <a:srgbClr val="1A1D23"/>
+                </a:solidFill>
+              </a:defRPr>
+            </a:pPr>
             <a:r>
               <a:rPr sz="3600" b="1">
                 <a:solidFill>
@@ -53484,7 +55733,13 @@
           </a:bodyPr>
           <a:lstStyle/>
           <a:p>
-            <a:pPr algn="l"/>
+            <a:pPr algn="l">
+              <a:defRPr>
+                <a:solidFill>
+                  <a:srgbClr val="64748B"/>
+                </a:solidFill>
+              </a:defRPr>
+            </a:pPr>
             <a:r>
               <a:rPr sz="1800" i="1">
                 <a:solidFill>
@@ -53609,7 +55864,13 @@
           </a:bodyPr>
           <a:lstStyle/>
           <a:p>
-            <a:pPr algn="l"/>
+            <a:pPr algn="l">
+              <a:defRPr>
+                <a:solidFill>
+                  <a:srgbClr val="1A1D23"/>
+                </a:solidFill>
+              </a:defRPr>
+            </a:pPr>
             <a:r>
               <a:rPr sz="1500" b="1" i="0">
                 <a:solidFill>
@@ -53644,7 +55905,13 @@
           </a:bodyPr>
           <a:lstStyle/>
           <a:p>
-            <a:pPr algn="l"/>
+            <a:pPr algn="l">
+              <a:defRPr>
+                <a:solidFill>
+                  <a:srgbClr val="64748B"/>
+                </a:solidFill>
+              </a:defRPr>
+            </a:pPr>
             <a:r>
               <a:rPr sz="1150" b="0" i="0">
                 <a:solidFill>
@@ -53769,7 +56036,13 @@
           </a:bodyPr>
           <a:lstStyle/>
           <a:p>
-            <a:pPr algn="l"/>
+            <a:pPr algn="l">
+              <a:defRPr>
+                <a:solidFill>
+                  <a:srgbClr val="1A1D23"/>
+                </a:solidFill>
+              </a:defRPr>
+            </a:pPr>
             <a:r>
               <a:rPr sz="1500" b="1" i="0">
                 <a:solidFill>
@@ -53804,7 +56077,13 @@
           </a:bodyPr>
           <a:lstStyle/>
           <a:p>
-            <a:pPr algn="l"/>
+            <a:pPr algn="l">
+              <a:defRPr>
+                <a:solidFill>
+                  <a:srgbClr val="64748B"/>
+                </a:solidFill>
+              </a:defRPr>
+            </a:pPr>
             <a:r>
               <a:rPr sz="1150" b="0" i="0">
                 <a:solidFill>
@@ -53929,7 +56208,13 @@
           </a:bodyPr>
           <a:lstStyle/>
           <a:p>
-            <a:pPr algn="l"/>
+            <a:pPr algn="l">
+              <a:defRPr>
+                <a:solidFill>
+                  <a:srgbClr val="1A1D23"/>
+                </a:solidFill>
+              </a:defRPr>
+            </a:pPr>
             <a:r>
               <a:rPr sz="1500" b="1" i="0">
                 <a:solidFill>
@@ -53964,7 +56249,13 @@
           </a:bodyPr>
           <a:lstStyle/>
           <a:p>
-            <a:pPr algn="l"/>
+            <a:pPr algn="l">
+              <a:defRPr>
+                <a:solidFill>
+                  <a:srgbClr val="64748B"/>
+                </a:solidFill>
+              </a:defRPr>
+            </a:pPr>
             <a:r>
               <a:rPr sz="1150" b="0" i="0">
                 <a:solidFill>
@@ -54089,7 +56380,13 @@
           </a:bodyPr>
           <a:lstStyle/>
           <a:p>
-            <a:pPr algn="l"/>
+            <a:pPr algn="l">
+              <a:defRPr>
+                <a:solidFill>
+                  <a:srgbClr val="1A1D23"/>
+                </a:solidFill>
+              </a:defRPr>
+            </a:pPr>
             <a:r>
               <a:rPr sz="1500" b="1" i="0">
                 <a:solidFill>
@@ -54124,7 +56421,13 @@
           </a:bodyPr>
           <a:lstStyle/>
           <a:p>
-            <a:pPr algn="l"/>
+            <a:pPr algn="l">
+              <a:defRPr>
+                <a:solidFill>
+                  <a:srgbClr val="64748B"/>
+                </a:solidFill>
+              </a:defRPr>
+            </a:pPr>
             <a:r>
               <a:rPr sz="1150" b="0" i="0">
                 <a:solidFill>
@@ -54249,7 +56552,13 @@
           </a:bodyPr>
           <a:lstStyle/>
           <a:p>
-            <a:pPr algn="l"/>
+            <a:pPr algn="l">
+              <a:defRPr>
+                <a:solidFill>
+                  <a:srgbClr val="1A1D23"/>
+                </a:solidFill>
+              </a:defRPr>
+            </a:pPr>
             <a:r>
               <a:rPr sz="1500" b="1" i="0">
                 <a:solidFill>
@@ -54284,7 +56593,13 @@
           </a:bodyPr>
           <a:lstStyle/>
           <a:p>
-            <a:pPr algn="l"/>
+            <a:pPr algn="l">
+              <a:defRPr>
+                <a:solidFill>
+                  <a:srgbClr val="64748B"/>
+                </a:solidFill>
+              </a:defRPr>
+            </a:pPr>
             <a:r>
               <a:rPr sz="1150" b="0" i="0">
                 <a:solidFill>
@@ -54409,7 +56724,13 @@
           </a:bodyPr>
           <a:lstStyle/>
           <a:p>
-            <a:pPr algn="l"/>
+            <a:pPr algn="l">
+              <a:defRPr>
+                <a:solidFill>
+                  <a:srgbClr val="1A1D23"/>
+                </a:solidFill>
+              </a:defRPr>
+            </a:pPr>
             <a:r>
               <a:rPr sz="1500" b="1" i="0">
                 <a:solidFill>
@@ -54444,7 +56765,13 @@
           </a:bodyPr>
           <a:lstStyle/>
           <a:p>
-            <a:pPr algn="l"/>
+            <a:pPr algn="l">
+              <a:defRPr>
+                <a:solidFill>
+                  <a:srgbClr val="64748B"/>
+                </a:solidFill>
+              </a:defRPr>
+            </a:pPr>
             <a:r>
               <a:rPr sz="1150" b="0" i="0">
                 <a:solidFill>
@@ -54653,7 +56980,13 @@
           </a:bodyPr>
           <a:lstStyle/>
           <a:p>
-            <a:pPr algn="l"/>
+            <a:pPr algn="l">
+              <a:defRPr>
+                <a:solidFill>
+                  <a:srgbClr val="1A1D23"/>
+                </a:solidFill>
+              </a:defRPr>
+            </a:pPr>
             <a:r>
               <a:rPr sz="3600" b="1">
                 <a:solidFill>
@@ -54692,6 +57025,11 @@
               <a:spcAft>
                 <a:spcPts val="600"/>
               </a:spcAft>
+              <a:defRPr>
+                <a:solidFill>
+                  <a:srgbClr val="1A1D23"/>
+                </a:solidFill>
+              </a:defRPr>
             </a:pPr>
             <a:r>
               <a:rPr sz="1600" b="1">
@@ -54726,6 +57064,11 @@
               <a:spcAft>
                 <a:spcPts val="600"/>
               </a:spcAft>
+              <a:defRPr>
+                <a:solidFill>
+                  <a:srgbClr val="1A1D23"/>
+                </a:solidFill>
+              </a:defRPr>
             </a:pPr>
             <a:r>
               <a:rPr sz="1600" b="1">
@@ -54760,6 +57103,11 @@
               <a:spcAft>
                 <a:spcPts val="600"/>
               </a:spcAft>
+              <a:defRPr>
+                <a:solidFill>
+                  <a:srgbClr val="1A1D23"/>
+                </a:solidFill>
+              </a:defRPr>
             </a:pPr>
             <a:r>
               <a:rPr sz="1600" b="1">
@@ -54794,6 +57142,11 @@
               <a:spcAft>
                 <a:spcPts val="600"/>
               </a:spcAft>
+              <a:defRPr>
+                <a:solidFill>
+                  <a:srgbClr val="1A1D23"/>
+                </a:solidFill>
+              </a:defRPr>
             </a:pPr>
             <a:r>
               <a:rPr sz="1600" b="1">
@@ -54828,6 +57181,11 @@
               <a:spcAft>
                 <a:spcPts val="600"/>
               </a:spcAft>
+              <a:defRPr>
+                <a:solidFill>
+                  <a:srgbClr val="1A1D23"/>
+                </a:solidFill>
+              </a:defRPr>
             </a:pPr>
             <a:r>
               <a:rPr sz="1600" b="1">
@@ -55055,7 +57413,13 @@
           </a:bodyPr>
           <a:lstStyle/>
           <a:p>
-            <a:pPr algn="l"/>
+            <a:pPr algn="l">
+              <a:defRPr>
+                <a:solidFill>
+                  <a:srgbClr val="1A1D23"/>
+                </a:solidFill>
+              </a:defRPr>
+            </a:pPr>
             <a:r>
               <a:rPr sz="3600" b="1">
                 <a:solidFill>
@@ -55090,7 +57454,13 @@
           </a:bodyPr>
           <a:lstStyle/>
           <a:p>
-            <a:pPr algn="l"/>
+            <a:pPr algn="l">
+              <a:defRPr>
+                <a:solidFill>
+                  <a:srgbClr val="64748B"/>
+                </a:solidFill>
+              </a:defRPr>
+            </a:pPr>
             <a:r>
               <a:rPr sz="1800" i="1">
                 <a:solidFill>
@@ -55129,6 +57499,11 @@
               <a:spcAft>
                 <a:spcPts val="600"/>
               </a:spcAft>
+              <a:defRPr>
+                <a:solidFill>
+                  <a:srgbClr val="1A1D23"/>
+                </a:solidFill>
+              </a:defRPr>
             </a:pPr>
             <a:r>
               <a:rPr sz="1600" b="1">
@@ -55163,6 +57538,11 @@
               <a:spcAft>
                 <a:spcPts val="600"/>
               </a:spcAft>
+              <a:defRPr>
+                <a:solidFill>
+                  <a:srgbClr val="1A1D23"/>
+                </a:solidFill>
+              </a:defRPr>
             </a:pPr>
             <a:r>
               <a:rPr sz="1600" b="1">
@@ -55197,6 +57577,11 @@
               <a:spcAft>
                 <a:spcPts val="600"/>
               </a:spcAft>
+              <a:defRPr>
+                <a:solidFill>
+                  <a:srgbClr val="1A1D23"/>
+                </a:solidFill>
+              </a:defRPr>
             </a:pPr>
             <a:r>
               <a:rPr sz="1600" b="1">
@@ -55231,6 +57616,11 @@
               <a:spcAft>
                 <a:spcPts val="600"/>
               </a:spcAft>
+              <a:defRPr>
+                <a:solidFill>
+                  <a:srgbClr val="1A1D23"/>
+                </a:solidFill>
+              </a:defRPr>
             </a:pPr>
             <a:r>
               <a:rPr sz="1600" b="1">
@@ -55265,6 +57655,11 @@
               <a:spcAft>
                 <a:spcPts val="600"/>
               </a:spcAft>
+              <a:defRPr>
+                <a:solidFill>
+                  <a:srgbClr val="1A1D23"/>
+                </a:solidFill>
+              </a:defRPr>
             </a:pPr>
             <a:r>
               <a:rPr sz="1600" b="1">
@@ -55492,7 +57887,13 @@
           </a:bodyPr>
           <a:lstStyle/>
           <a:p>
-            <a:pPr algn="l"/>
+            <a:pPr algn="l">
+              <a:defRPr>
+                <a:solidFill>
+                  <a:srgbClr val="00D4A8"/>
+                </a:solidFill>
+              </a:defRPr>
+            </a:pPr>
             <a:r>
               <a:rPr sz="1800" b="1" i="0">
                 <a:solidFill>
@@ -55527,7 +57928,13 @@
           </a:bodyPr>
           <a:lstStyle/>
           <a:p>
-            <a:pPr algn="l"/>
+            <a:pPr algn="l">
+              <a:defRPr>
+                <a:solidFill>
+                  <a:srgbClr val="FFFFFF"/>
+                </a:solidFill>
+              </a:defRPr>
+            </a:pPr>
             <a:r>
               <a:rPr sz="4800" b="1">
                 <a:solidFill>
@@ -55562,7 +57969,13 @@
           </a:bodyPr>
           <a:lstStyle/>
           <a:p>
-            <a:pPr algn="l"/>
+            <a:pPr algn="l">
+              <a:defRPr>
+                <a:solidFill>
+                  <a:srgbClr val="C3EFE3"/>
+                </a:solidFill>
+              </a:defRPr>
+            </a:pPr>
             <a:r>
               <a:rPr sz="2000" i="0">
                 <a:solidFill>
@@ -55771,7 +58184,13 @@
           </a:bodyPr>
           <a:lstStyle/>
           <a:p>
-            <a:pPr algn="l"/>
+            <a:pPr algn="l">
+              <a:defRPr>
+                <a:solidFill>
+                  <a:srgbClr val="1A1D23"/>
+                </a:solidFill>
+              </a:defRPr>
+            </a:pPr>
             <a:r>
               <a:rPr sz="3600" b="1">
                 <a:solidFill>
@@ -55810,6 +58229,11 @@
               <a:spcAft>
                 <a:spcPts val="600"/>
               </a:spcAft>
+              <a:defRPr>
+                <a:solidFill>
+                  <a:srgbClr val="1A1D23"/>
+                </a:solidFill>
+              </a:defRPr>
             </a:pPr>
             <a:r>
               <a:rPr sz="1600" b="1">
@@ -55844,6 +58268,11 @@
               <a:spcAft>
                 <a:spcPts val="600"/>
               </a:spcAft>
+              <a:defRPr>
+                <a:solidFill>
+                  <a:srgbClr val="1A1D23"/>
+                </a:solidFill>
+              </a:defRPr>
             </a:pPr>
             <a:r>
               <a:rPr sz="1600" b="1">
@@ -55878,6 +58307,11 @@
               <a:spcAft>
                 <a:spcPts val="600"/>
               </a:spcAft>
+              <a:defRPr>
+                <a:solidFill>
+                  <a:srgbClr val="1A1D23"/>
+                </a:solidFill>
+              </a:defRPr>
             </a:pPr>
             <a:r>
               <a:rPr sz="1600" b="1">
@@ -55912,6 +58346,11 @@
               <a:spcAft>
                 <a:spcPts val="600"/>
               </a:spcAft>
+              <a:defRPr>
+                <a:solidFill>
+                  <a:srgbClr val="1A1D23"/>
+                </a:solidFill>
+              </a:defRPr>
             </a:pPr>
             <a:r>
               <a:rPr sz="1600" b="1">
@@ -55946,6 +58385,11 @@
               <a:spcAft>
                 <a:spcPts val="600"/>
               </a:spcAft>
+              <a:defRPr>
+                <a:solidFill>
+                  <a:srgbClr val="1A1D23"/>
+                </a:solidFill>
+              </a:defRPr>
             </a:pPr>
             <a:r>
               <a:rPr sz="1600" b="1">
@@ -56173,7 +58617,13 @@
           </a:bodyPr>
           <a:lstStyle/>
           <a:p>
-            <a:pPr algn="l"/>
+            <a:pPr algn="l">
+              <a:defRPr>
+                <a:solidFill>
+                  <a:srgbClr val="1A1D23"/>
+                </a:solidFill>
+              </a:defRPr>
+            </a:pPr>
             <a:r>
               <a:rPr sz="3600" b="1">
                 <a:solidFill>
@@ -56212,6 +58662,11 @@
               <a:spcAft>
                 <a:spcPts val="600"/>
               </a:spcAft>
+              <a:defRPr>
+                <a:solidFill>
+                  <a:srgbClr val="1A1D23"/>
+                </a:solidFill>
+              </a:defRPr>
             </a:pPr>
             <a:r>
               <a:rPr sz="1600" b="1">
@@ -56246,6 +58701,11 @@
               <a:spcAft>
                 <a:spcPts val="600"/>
               </a:spcAft>
+              <a:defRPr>
+                <a:solidFill>
+                  <a:srgbClr val="1A1D23"/>
+                </a:solidFill>
+              </a:defRPr>
             </a:pPr>
             <a:r>
               <a:rPr sz="1600" b="1">
@@ -56280,6 +58740,11 @@
               <a:spcAft>
                 <a:spcPts val="600"/>
               </a:spcAft>
+              <a:defRPr>
+                <a:solidFill>
+                  <a:srgbClr val="1A1D23"/>
+                </a:solidFill>
+              </a:defRPr>
             </a:pPr>
             <a:r>
               <a:rPr sz="1600" b="1">
@@ -56314,6 +58779,11 @@
               <a:spcAft>
                 <a:spcPts val="600"/>
               </a:spcAft>
+              <a:defRPr>
+                <a:solidFill>
+                  <a:srgbClr val="1A1D23"/>
+                </a:solidFill>
+              </a:defRPr>
             </a:pPr>
             <a:r>
               <a:rPr sz="1600" b="1">
@@ -56348,6 +58818,11 @@
               <a:spcAft>
                 <a:spcPts val="600"/>
               </a:spcAft>
+              <a:defRPr>
+                <a:solidFill>
+                  <a:srgbClr val="1A1D23"/>
+                </a:solidFill>
+              </a:defRPr>
             </a:pPr>
             <a:r>
               <a:rPr sz="1600" b="1">
@@ -56575,7 +59050,13 @@
           </a:bodyPr>
           <a:lstStyle/>
           <a:p>
-            <a:pPr algn="l"/>
+            <a:pPr algn="l">
+              <a:defRPr>
+                <a:solidFill>
+                  <a:srgbClr val="1A1D23"/>
+                </a:solidFill>
+              </a:defRPr>
+            </a:pPr>
             <a:r>
               <a:rPr sz="3600" b="1">
                 <a:solidFill>
@@ -56614,6 +59095,11 @@
               <a:spcAft>
                 <a:spcPts val="600"/>
               </a:spcAft>
+              <a:defRPr>
+                <a:solidFill>
+                  <a:srgbClr val="1A1D23"/>
+                </a:solidFill>
+              </a:defRPr>
             </a:pPr>
             <a:r>
               <a:rPr sz="1600" b="1">
@@ -56648,6 +59134,11 @@
               <a:spcAft>
                 <a:spcPts val="600"/>
               </a:spcAft>
+              <a:defRPr>
+                <a:solidFill>
+                  <a:srgbClr val="1A1D23"/>
+                </a:solidFill>
+              </a:defRPr>
             </a:pPr>
             <a:r>
               <a:rPr sz="1600" b="1">
@@ -56682,6 +59173,11 @@
               <a:spcAft>
                 <a:spcPts val="600"/>
               </a:spcAft>
+              <a:defRPr>
+                <a:solidFill>
+                  <a:srgbClr val="1A1D23"/>
+                </a:solidFill>
+              </a:defRPr>
             </a:pPr>
             <a:r>
               <a:rPr sz="1600" b="1">
@@ -56716,6 +59212,11 @@
               <a:spcAft>
                 <a:spcPts val="600"/>
               </a:spcAft>
+              <a:defRPr>
+                <a:solidFill>
+                  <a:srgbClr val="1A1D23"/>
+                </a:solidFill>
+              </a:defRPr>
             </a:pPr>
             <a:r>
               <a:rPr sz="1600" b="1">
@@ -56750,6 +59251,11 @@
               <a:spcAft>
                 <a:spcPts val="600"/>
               </a:spcAft>
+              <a:defRPr>
+                <a:solidFill>
+                  <a:srgbClr val="1A1D23"/>
+                </a:solidFill>
+              </a:defRPr>
             </a:pPr>
             <a:r>
               <a:rPr sz="1600" b="1">
@@ -56977,7 +59483,13 @@
           </a:bodyPr>
           <a:lstStyle/>
           <a:p>
-            <a:pPr algn="l"/>
+            <a:pPr algn="l">
+              <a:defRPr>
+                <a:solidFill>
+                  <a:srgbClr val="1A1D23"/>
+                </a:solidFill>
+              </a:defRPr>
+            </a:pPr>
             <a:r>
               <a:rPr sz="3600" b="1">
                 <a:solidFill>
@@ -57012,7 +59524,13 @@
           </a:bodyPr>
           <a:lstStyle/>
           <a:p>
-            <a:pPr algn="l"/>
+            <a:pPr algn="l">
+              <a:defRPr>
+                <a:solidFill>
+                  <a:srgbClr val="64748B"/>
+                </a:solidFill>
+              </a:defRPr>
+            </a:pPr>
             <a:r>
               <a:rPr sz="1800" i="1">
                 <a:solidFill>
@@ -57051,6 +59569,11 @@
               <a:spcAft>
                 <a:spcPts val="600"/>
               </a:spcAft>
+              <a:defRPr>
+                <a:solidFill>
+                  <a:srgbClr val="1A1D23"/>
+                </a:solidFill>
+              </a:defRPr>
             </a:pPr>
             <a:r>
               <a:rPr sz="1600" b="1">
@@ -57085,6 +59608,11 @@
               <a:spcAft>
                 <a:spcPts val="600"/>
               </a:spcAft>
+              <a:defRPr>
+                <a:solidFill>
+                  <a:srgbClr val="1A1D23"/>
+                </a:solidFill>
+              </a:defRPr>
             </a:pPr>
             <a:r>
               <a:rPr sz="1600" b="1">
@@ -57119,6 +59647,11 @@
               <a:spcAft>
                 <a:spcPts val="600"/>
               </a:spcAft>
+              <a:defRPr>
+                <a:solidFill>
+                  <a:srgbClr val="1A1D23"/>
+                </a:solidFill>
+              </a:defRPr>
             </a:pPr>
             <a:r>
               <a:rPr sz="1600" b="1">
@@ -57153,6 +59686,11 @@
               <a:spcAft>
                 <a:spcPts val="600"/>
               </a:spcAft>
+              <a:defRPr>
+                <a:solidFill>
+                  <a:srgbClr val="1A1D23"/>
+                </a:solidFill>
+              </a:defRPr>
             </a:pPr>
             <a:r>
               <a:rPr sz="1600" b="1">
@@ -57187,6 +59725,11 @@
               <a:spcAft>
                 <a:spcPts val="600"/>
               </a:spcAft>
+              <a:defRPr>
+                <a:solidFill>
+                  <a:srgbClr val="1A1D23"/>
+                </a:solidFill>
+              </a:defRPr>
             </a:pPr>
             <a:r>
               <a:rPr sz="1600" b="1">
